--- a/docs/最新版/03_営業関係/工務店向け説明_MVP版.pptx
+++ b/docs/最新版/03_営業関係/工務店向け説明_MVP版.pptx
@@ -24,6 +24,10 @@
     <p:sldId id="272" r:id="rId23"/>
     <p:sldId id="273" r:id="rId24"/>
     <p:sldId id="274" r:id="rId25"/>
+    <p:sldId id="275" r:id="rId26"/>
+    <p:sldId id="276" r:id="rId27"/>
+    <p:sldId id="277" r:id="rId28"/>
+    <p:sldId id="278" r:id="rId29"/>
   </p:sldIdLst>
   <p:sldSz cx="12191695" cy="6858000" type="screen4x3"/>
   <p:notesSz cx="6858000" cy="9144000"/>
@@ -3214,7 +3218,7 @@
                 </a:solidFill>
                 <a:latin typeface="Hiragino Sans"/>
               </a:rPr>
-              <a:t>2026-05-01 MVPリリース</a:t>
+              <a:t>2026-05-01 MVP v2 (核ループ集中・資料請求は主役から外す・3%付加価値明示)</a:t>
             </a:r>
           </a:p>
         </p:txBody>
@@ -3345,7 +3349,7 @@
                 </a:solidFill>
                 <a:latin typeface="Hiragino Sans"/>
               </a:rPr>
-              <a:t>4. 御社へのメリット  (2/3)</a:t>
+              <a:t>5. 成果報酬 3% の付加価値 (重要)  (2/3)</a:t>
             </a:r>
           </a:p>
         </p:txBody>
@@ -3358,29 +3362,29 @@
         </p:nvSpPr>
         <p:spPr>
           <a:xfrm>
-            <a:off x="640080" y="1097280"/>
-            <a:ext cx="11155680" cy="384048"/>
-          </a:xfrm>
-          <a:prstGeom prst="rect">
-            <a:avLst/>
-          </a:prstGeom>
-          <a:noFill/>
-        </p:spPr>
-        <p:txBody>
-          <a:bodyPr wrap="square" lIns="0" rIns="0" tIns="0" bIns="0">
-            <a:spAutoFit/>
-          </a:bodyPr>
-          <a:lstStyle/>
-          <a:p>
-            <a:pPr algn="l"/>
-            <a:r>
-              <a:rPr sz="1200" b="0">
+            <a:off x="365760" y="1097280"/>
+            <a:ext cx="11430000" cy="457200"/>
+          </a:xfrm>
+          <a:prstGeom prst="rect">
+            <a:avLst/>
+          </a:prstGeom>
+          <a:noFill/>
+        </p:spPr>
+        <p:txBody>
+          <a:bodyPr wrap="square" lIns="0" rIns="0" tIns="0" bIns="0">
+            <a:spAutoFit/>
+          </a:bodyPr>
+          <a:lstStyle/>
+          <a:p>
+            <a:pPr algn="l"/>
+            <a:r>
+              <a:rPr sz="1800" b="1">
                 <a:solidFill>
                   <a:srgbClr val="3D2200"/>
                 </a:solidFill>
                 <a:latin typeface="Hiragino Sans"/>
               </a:rPr>
-              <a:t>• **ルームツアー動画撮影 ¥75,000/本**（正規価格 ¥150,000/本の半額）</a:t>
+              <a:t>3. AI診断マッチング</a:t>
             </a:r>
           </a:p>
         </p:txBody>
@@ -3393,29 +3397,29 @@
         </p:nvSpPr>
         <p:spPr>
           <a:xfrm>
-            <a:off x="640080" y="1481328"/>
-            <a:ext cx="11155680" cy="384048"/>
-          </a:xfrm>
-          <a:prstGeom prst="rect">
-            <a:avLst/>
-          </a:prstGeom>
-          <a:noFill/>
-        </p:spPr>
-        <p:txBody>
-          <a:bodyPr wrap="square" lIns="0" rIns="0" tIns="0" bIns="0">
-            <a:spAutoFit/>
-          </a:bodyPr>
-          <a:lstStyle/>
-          <a:p>
-            <a:pPr algn="l"/>
-            <a:r>
-              <a:rPr sz="1200" b="0">
+            <a:off x="457200" y="1600200"/>
+            <a:ext cx="11338560" cy="457200"/>
+          </a:xfrm>
+          <a:prstGeom prst="rect">
+            <a:avLst/>
+          </a:prstGeom>
+          <a:noFill/>
+        </p:spPr>
+        <p:txBody>
+          <a:bodyPr wrap="square" lIns="0" rIns="0" tIns="0" bIns="0">
+            <a:spAutoFit/>
+          </a:bodyPr>
+          <a:lstStyle/>
+          <a:p>
+            <a:pPr algn="l"/>
+            <a:r>
+              <a:rPr sz="1300" b="0">
                 <a:solidFill>
                   <a:srgbClr val="3D2200"/>
                 </a:solidFill>
                 <a:latin typeface="Hiragino Sans"/>
               </a:rPr>
-              <a:t>• 業界ニュース・記事で露出増</a:t>
+              <a:t>10問のAI家づくり診断で、家族構成・予算・希望エリア・性能志向から「相性の良い工務店3社」を自動推薦します。工務店側は「温度感が高く、方向性が合った」リードだけを受け取ります。</a:t>
             </a:r>
           </a:p>
         </p:txBody>
@@ -3428,29 +3432,29 @@
         </p:nvSpPr>
         <p:spPr>
           <a:xfrm>
-            <a:off x="640080" y="1865376"/>
-            <a:ext cx="11155680" cy="384048"/>
-          </a:xfrm>
-          <a:prstGeom prst="rect">
-            <a:avLst/>
-          </a:prstGeom>
-          <a:noFill/>
-        </p:spPr>
-        <p:txBody>
-          <a:bodyPr wrap="square" lIns="0" rIns="0" tIns="0" bIns="0">
-            <a:spAutoFit/>
-          </a:bodyPr>
-          <a:lstStyle/>
-          <a:p>
-            <a:pPr algn="l"/>
-            <a:r>
-              <a:rPr sz="1200" b="0">
+            <a:off x="365760" y="2103120"/>
+            <a:ext cx="11430000" cy="457200"/>
+          </a:xfrm>
+          <a:prstGeom prst="rect">
+            <a:avLst/>
+          </a:prstGeom>
+          <a:noFill/>
+        </p:spPr>
+        <p:txBody>
+          <a:bodyPr wrap="square" lIns="0" rIns="0" tIns="0" bIns="0">
+            <a:spAutoFit/>
+          </a:bodyPr>
+          <a:lstStyle/>
+          <a:p>
+            <a:pPr algn="l"/>
+            <a:r>
+              <a:rPr sz="1800" b="1">
                 <a:solidFill>
                   <a:srgbClr val="3D2200"/>
                 </a:solidFill>
                 <a:latin typeface="Hiragino Sans"/>
               </a:rPr>
-              <a:t>• 見学会予約は **¥25,000/件**（正規価格 ¥50,000/件の半額）</a:t>
+              <a:t>4. 連絡希望条件の整理 (Smart Match)</a:t>
             </a:r>
           </a:p>
         </p:txBody>
@@ -3463,7 +3467,42 @@
         </p:nvSpPr>
         <p:spPr>
           <a:xfrm>
-            <a:off x="365760" y="2249424"/>
+            <a:off x="457200" y="2606039"/>
+            <a:ext cx="11338560" cy="457200"/>
+          </a:xfrm>
+          <a:prstGeom prst="rect">
+            <a:avLst/>
+          </a:prstGeom>
+          <a:noFill/>
+        </p:spPr>
+        <p:txBody>
+          <a:bodyPr wrap="square" lIns="0" rIns="0" tIns="0" bIns="0">
+            <a:spAutoFit/>
+          </a:bodyPr>
+          <a:lstStyle/>
+          <a:p>
+            <a:pPr algn="l"/>
+            <a:r>
+              <a:rPr sz="1300" b="0">
+                <a:solidFill>
+                  <a:srgbClr val="3D2200"/>
+                </a:solidFill>
+                <a:latin typeface="Hiragino Sans"/>
+              </a:rPr>
+              <a:t>会員ユーザーは連絡頻度・時間帯・手段・検討フェーズを事前設定します。見学会予約時にこの情報が工務店へ自動共有され、お互いに無駄のない対応ができます。</a:t>
+            </a:r>
+          </a:p>
+        </p:txBody>
+      </p:sp>
+      <p:sp>
+        <p:nvSpPr>
+          <p:cNvPr id="8" name="TextBox 7"/>
+          <p:cNvSpPr txBox="1"/>
+          <p:nvPr/>
+        </p:nvSpPr>
+        <p:spPr>
+          <a:xfrm>
+            <a:off x="365760" y="3108959"/>
             <a:ext cx="11430000" cy="457200"/>
           </a:xfrm>
           <a:prstGeom prst="rect">
@@ -3485,147 +3524,7 @@
                 </a:solidFill>
                 <a:latin typeface="Hiragino Sans"/>
               </a:rPr>
-              <a:t>Phase 3（9〜11月）</a:t>
-            </a:r>
-          </a:p>
-        </p:txBody>
-      </p:sp>
-      <p:sp>
-        <p:nvSpPr>
-          <p:cNvPr id="8" name="TextBox 7"/>
-          <p:cNvSpPr txBox="1"/>
-          <p:nvPr/>
-        </p:nvSpPr>
-        <p:spPr>
-          <a:xfrm>
-            <a:off x="640080" y="2752344"/>
-            <a:ext cx="11155680" cy="384048"/>
-          </a:xfrm>
-          <a:prstGeom prst="rect">
-            <a:avLst/>
-          </a:prstGeom>
-          <a:noFill/>
-        </p:spPr>
-        <p:txBody>
-          <a:bodyPr wrap="square" lIns="0" rIns="0" tIns="0" bIns="0">
-            <a:spAutoFit/>
-          </a:bodyPr>
-          <a:lstStyle/>
-          <a:p>
-            <a:pPr algn="l"/>
-            <a:r>
-              <a:rPr sz="1200" b="0">
-                <a:solidFill>
-                  <a:srgbClr val="3D2200"/>
-                </a:solidFill>
-                <a:latin typeface="Hiragino Sans"/>
-              </a:rPr>
-              <a:t>• **月額掲載プラン 初年度12ヶ月 無料**（正規価格 ¥30,000/月）</a:t>
-            </a:r>
-          </a:p>
-        </p:txBody>
-      </p:sp>
-      <p:sp>
-        <p:nvSpPr>
-          <p:cNvPr id="9" name="TextBox 8"/>
-          <p:cNvSpPr txBox="1"/>
-          <p:nvPr/>
-        </p:nvSpPr>
-        <p:spPr>
-          <a:xfrm>
-            <a:off x="640080" y="3136391"/>
-            <a:ext cx="11155680" cy="384048"/>
-          </a:xfrm>
-          <a:prstGeom prst="rect">
-            <a:avLst/>
-          </a:prstGeom>
-          <a:noFill/>
-        </p:spPr>
-        <p:txBody>
-          <a:bodyPr wrap="square" lIns="0" rIns="0" tIns="0" bIns="0">
-            <a:spAutoFit/>
-          </a:bodyPr>
-          <a:lstStyle/>
-          <a:p>
-            <a:pPr algn="l"/>
-            <a:r>
-              <a:rPr sz="1200" b="0">
-                <a:solidFill>
-                  <a:srgbClr val="3D2200"/>
-                </a:solidFill>
-                <a:latin typeface="Hiragino Sans"/>
-              </a:rPr>
-              <a:t>• 物件情報（建売・土地）の掲載がセルフサービスで可能に</a:t>
-            </a:r>
-          </a:p>
-        </p:txBody>
-      </p:sp>
-      <p:sp>
-        <p:nvSpPr>
-          <p:cNvPr id="10" name="TextBox 9"/>
-          <p:cNvSpPr txBox="1"/>
-          <p:nvPr/>
-        </p:nvSpPr>
-        <p:spPr>
-          <a:xfrm>
-            <a:off x="640080" y="3520439"/>
-            <a:ext cx="11155680" cy="384048"/>
-          </a:xfrm>
-          <a:prstGeom prst="rect">
-            <a:avLst/>
-          </a:prstGeom>
-          <a:noFill/>
-        </p:spPr>
-        <p:txBody>
-          <a:bodyPr wrap="square" lIns="0" rIns="0" tIns="0" bIns="0">
-            <a:spAutoFit/>
-          </a:bodyPr>
-          <a:lstStyle/>
-          <a:p>
-            <a:pPr algn="l"/>
-            <a:r>
-              <a:rPr sz="1200" b="0">
-                <a:solidFill>
-                  <a:srgbClr val="3D2200"/>
-                </a:solidFill>
-                <a:latin typeface="Hiragino Sans"/>
-              </a:rPr>
-              <a:t>• 特集枠での露出</a:t>
-            </a:r>
-          </a:p>
-        </p:txBody>
-      </p:sp>
-      <p:sp>
-        <p:nvSpPr>
-          <p:cNvPr id="11" name="TextBox 10"/>
-          <p:cNvSpPr txBox="1"/>
-          <p:nvPr/>
-        </p:nvSpPr>
-        <p:spPr>
-          <a:xfrm>
-            <a:off x="365760" y="3904487"/>
-            <a:ext cx="11430000" cy="457200"/>
-          </a:xfrm>
-          <a:prstGeom prst="rect">
-            <a:avLst/>
-          </a:prstGeom>
-          <a:noFill/>
-        </p:spPr>
-        <p:txBody>
-          <a:bodyPr wrap="square" lIns="0" rIns="0" tIns="0" bIns="0">
-            <a:spAutoFit/>
-          </a:bodyPr>
-          <a:lstStyle/>
-          <a:p>
-            <a:pPr algn="l"/>
-            <a:r>
-              <a:rPr sz="1800" b="1">
-                <a:solidFill>
-                  <a:srgbClr val="3D2200"/>
-                </a:solidFill>
-                <a:latin typeface="Hiragino Sans"/>
-              </a:rPr>
-              <a:t>Phase 4 以降</a:t>
+              <a:t>5. 高温度化された状態での見学会送客</a:t>
             </a:r>
           </a:p>
         </p:txBody>
@@ -3721,7 +3620,7 @@
                 </a:solidFill>
                 <a:latin typeface="Hiragino Sans"/>
               </a:rPr>
-              <a:t>4. 御社へのメリット  (3/3)</a:t>
+              <a:t>5. 成果報酬 3% の付加価値 (重要)  (3/3)</a:t>
             </a:r>
           </a:p>
         </p:txBody>
@@ -3734,29 +3633,29 @@
         </p:nvSpPr>
         <p:spPr>
           <a:xfrm>
-            <a:off x="640080" y="1097280"/>
-            <a:ext cx="11155680" cy="384048"/>
-          </a:xfrm>
-          <a:prstGeom prst="rect">
-            <a:avLst/>
-          </a:prstGeom>
-          <a:noFill/>
-        </p:spPr>
-        <p:txBody>
-          <a:bodyPr wrap="square" lIns="0" rIns="0" tIns="0" bIns="0">
-            <a:spAutoFit/>
-          </a:bodyPr>
-          <a:lstStyle/>
-          <a:p>
-            <a:pPr algn="l"/>
-            <a:r>
-              <a:rPr sz="1200" b="0">
+            <a:off x="457200" y="1097280"/>
+            <a:ext cx="11338560" cy="457200"/>
+          </a:xfrm>
+          <a:prstGeom prst="rect">
+            <a:avLst/>
+          </a:prstGeom>
+          <a:noFill/>
+        </p:spPr>
+        <p:txBody>
+          <a:bodyPr wrap="square" lIns="0" rIns="0" tIns="0" bIns="0">
+            <a:spAutoFit/>
+          </a:bodyPr>
+          <a:lstStyle/>
+          <a:p>
+            <a:pPr algn="l"/>
+            <a:r>
+              <a:rPr sz="1300" b="0">
                 <a:solidFill>
                   <a:srgbClr val="3D2200"/>
                 </a:solidFill>
                 <a:latin typeface="Hiragino Sans"/>
               </a:rPr>
-              <a:t>• **SaaS プラン ¥25,000/月**（正規価格 ¥50,000/月の半額）</a:t>
+              <a:t>見学会予約は「実物を体感したい」という強い意向の現れです。ぺいほーむ経由の予約は、上記 1〜4 のプロセスを経た温度感の高いリードとして届きます。</a:t>
             </a:r>
           </a:p>
         </p:txBody>
@@ -3769,29 +3668,29 @@
         </p:nvSpPr>
         <p:spPr>
           <a:xfrm>
-            <a:off x="640080" y="1481328"/>
-            <a:ext cx="11155680" cy="384048"/>
-          </a:xfrm>
-          <a:prstGeom prst="rect">
-            <a:avLst/>
-          </a:prstGeom>
-          <a:noFill/>
-        </p:spPr>
-        <p:txBody>
-          <a:bodyPr wrap="square" lIns="0" rIns="0" tIns="0" bIns="0">
-            <a:spAutoFit/>
-          </a:bodyPr>
-          <a:lstStyle/>
-          <a:p>
-            <a:pPr algn="l"/>
-            <a:r>
-              <a:rPr sz="1200" b="0">
+            <a:off x="365760" y="1600200"/>
+            <a:ext cx="11430000" cy="457200"/>
+          </a:xfrm>
+          <a:prstGeom prst="rect">
+            <a:avLst/>
+          </a:prstGeom>
+          <a:noFill/>
+        </p:spPr>
+        <p:txBody>
+          <a:bodyPr wrap="square" lIns="0" rIns="0" tIns="0" bIns="0">
+            <a:spAutoFit/>
+          </a:bodyPr>
+          <a:lstStyle/>
+          <a:p>
+            <a:pPr algn="l"/>
+            <a:r>
+              <a:rPr sz="1800" b="1">
                 <a:solidFill>
                   <a:srgbClr val="3D2200"/>
                 </a:solidFill>
                 <a:latin typeface="Hiragino Sans"/>
               </a:rPr>
-              <a:t>• AI質問無制限、月次レポート自動配信、インタビュー掲載</a:t>
+              <a:t>6. ナーチャリング支援</a:t>
             </a:r>
           </a:p>
         </p:txBody>
@@ -3804,7 +3703,7 @@
         </p:nvSpPr>
         <p:spPr>
           <a:xfrm>
-            <a:off x="457200" y="1865376"/>
+            <a:off x="457200" y="2103120"/>
             <a:ext cx="11338560" cy="457200"/>
           </a:xfrm>
           <a:prstGeom prst="rect">
@@ -3826,7 +3725,7 @@
                 </a:solidFill>
                 <a:latin typeface="Hiragino Sans"/>
               </a:rPr>
-              <a:t>**常に市場価格の 50% OFF（半額）が永久適用されます。** これは実績づくりにご協力いただくことへの感謝として、永続的に保証いたします。</a:t>
+              <a:t>Phase 2 以降は記事・ニュース・撮影プラン・月額掲載で検討期間中のユーザーとの接点を維持します。Phase 4 の匿名AI質問機能では、工務店が個人情報なしで質問に答えられます。</a:t>
             </a:r>
           </a:p>
         </p:txBody>
@@ -3922,7 +3821,7 @@
                 </a:solidFill>
                 <a:latin typeface="Hiragino Sans"/>
               </a:rPr>
-              <a:t>5. お願いしたいこと  (1/2)</a:t>
+              <a:t>6. フェーズ別 機能追加スケジュール  (1/2)</a:t>
             </a:r>
           </a:p>
         </p:txBody>
@@ -3935,29 +3834,29 @@
         </p:nvSpPr>
         <p:spPr>
           <a:xfrm>
-            <a:off x="365760" y="1097280"/>
-            <a:ext cx="11430000" cy="457200"/>
-          </a:xfrm>
-          <a:prstGeom prst="rect">
-            <a:avLst/>
-          </a:prstGeom>
-          <a:noFill/>
-        </p:spPr>
-        <p:txBody>
-          <a:bodyPr wrap="square" lIns="0" rIns="0" tIns="0" bIns="0">
-            <a:spAutoFit/>
-          </a:bodyPr>
-          <a:lstStyle/>
-          <a:p>
-            <a:pPr algn="l"/>
-            <a:r>
-              <a:rPr sz="1800" b="1">
+            <a:off x="457200" y="1097280"/>
+            <a:ext cx="11338560" cy="457200"/>
+          </a:xfrm>
+          <a:prstGeom prst="rect">
+            <a:avLst/>
+          </a:prstGeom>
+          <a:noFill/>
+        </p:spPr>
+        <p:txBody>
+          <a:bodyPr wrap="square" lIns="0" rIns="0" tIns="0" bIns="0">
+            <a:spAutoFit/>
+          </a:bodyPr>
+          <a:lstStyle/>
+          <a:p>
+            <a:pPr algn="l"/>
+            <a:r>
+              <a:rPr sz="1300" b="0">
                 <a:solidFill>
                   <a:srgbClr val="3D2200"/>
                 </a:solidFill>
                 <a:latin typeface="Hiragino Sans"/>
               </a:rPr>
-              <a:t>5月1日までに</a:t>
+              <a:t>Phase 1 (2026/05/01〜06/30): MVP 運用開始 (見学会予約 ¥50,000/件)</a:t>
             </a:r>
           </a:p>
         </p:txBody>
@@ -3970,29 +3869,29 @@
         </p:nvSpPr>
         <p:spPr>
           <a:xfrm>
-            <a:off x="640080" y="1600200"/>
-            <a:ext cx="11155680" cy="384048"/>
-          </a:xfrm>
-          <a:prstGeom prst="rect">
-            <a:avLst/>
-          </a:prstGeom>
-          <a:noFill/>
-        </p:spPr>
-        <p:txBody>
-          <a:bodyPr wrap="square" lIns="0" rIns="0" tIns="0" bIns="0">
-            <a:spAutoFit/>
-          </a:bodyPr>
-          <a:lstStyle/>
-          <a:p>
-            <a:pPr algn="l"/>
-            <a:r>
-              <a:rPr sz="1200" b="0">
+            <a:off x="457200" y="1600200"/>
+            <a:ext cx="11338560" cy="457200"/>
+          </a:xfrm>
+          <a:prstGeom prst="rect">
+            <a:avLst/>
+          </a:prstGeom>
+          <a:noFill/>
+        </p:spPr>
+        <p:txBody>
+          <a:bodyPr wrap="square" lIns="0" rIns="0" tIns="0" bIns="0">
+            <a:spAutoFit/>
+          </a:bodyPr>
+          <a:lstStyle/>
+          <a:p>
+            <a:pPr algn="l"/>
+            <a:r>
+              <a:rPr sz="1300" b="0">
                 <a:solidFill>
                   <a:srgbClr val="3D2200"/>
                 </a:solidFill>
                 <a:latin typeface="Hiragino Sans"/>
               </a:rPr>
-              <a:t>• [ ] **料金プラン書面の締結**（本資料と `料金プラン_MVP版.md` を添えて）</a:t>
+              <a:t>Phase 2 (2026/07/01〜08/31): 業界ニュース・記事・コラム復活、ルームツアー撮影プラン開始 (¥150,000/本)</a:t>
             </a:r>
           </a:p>
         </p:txBody>
@@ -4005,29 +3904,29 @@
         </p:nvSpPr>
         <p:spPr>
           <a:xfrm>
-            <a:off x="640080" y="1984248"/>
-            <a:ext cx="11155680" cy="384048"/>
-          </a:xfrm>
-          <a:prstGeom prst="rect">
-            <a:avLst/>
-          </a:prstGeom>
-          <a:noFill/>
-        </p:spPr>
-        <p:txBody>
-          <a:bodyPr wrap="square" lIns="0" rIns="0" tIns="0" bIns="0">
-            <a:spAutoFit/>
-          </a:bodyPr>
-          <a:lstStyle/>
-          <a:p>
-            <a:pPr algn="l"/>
-            <a:r>
-              <a:rPr sz="1200" b="0">
+            <a:off x="457200" y="2103120"/>
+            <a:ext cx="11338560" cy="457200"/>
+          </a:xfrm>
+          <a:prstGeom prst="rect">
+            <a:avLst/>
+          </a:prstGeom>
+          <a:noFill/>
+        </p:spPr>
+        <p:txBody>
+          <a:bodyPr wrap="square" lIns="0" rIns="0" tIns="0" bIns="0">
+            <a:spAutoFit/>
+          </a:bodyPr>
+          <a:lstStyle/>
+          <a:p>
+            <a:pPr algn="l"/>
+            <a:r>
+              <a:rPr sz="1300" b="0">
                 <a:solidFill>
                   <a:srgbClr val="3D2200"/>
                 </a:solidFill>
                 <a:latin typeface="Hiragino Sans"/>
               </a:rPr>
-              <a:t>• [ ] **掲載情報の最終チェック**（社名・所在地・代表者・URL・電話番号）</a:t>
+              <a:t>Phase 3 (2026/09/01〜11/30): ローンシミュレーター復活、月額掲載プラン開始 (¥30,000/月・¥80,000/月)、成果報酬 3% 導入</a:t>
             </a:r>
           </a:p>
         </p:txBody>
@@ -4040,169 +3939,29 @@
         </p:nvSpPr>
         <p:spPr>
           <a:xfrm>
-            <a:off x="640080" y="2368296"/>
-            <a:ext cx="11155680" cy="384048"/>
-          </a:xfrm>
-          <a:prstGeom prst="rect">
-            <a:avLst/>
-          </a:prstGeom>
-          <a:noFill/>
-        </p:spPr>
-        <p:txBody>
-          <a:bodyPr wrap="square" lIns="0" rIns="0" tIns="0" bIns="0">
-            <a:spAutoFit/>
-          </a:bodyPr>
-          <a:lstStyle/>
-          <a:p>
-            <a:pPr algn="l"/>
-            <a:r>
-              <a:rPr sz="1200" b="0">
+            <a:off x="457200" y="2606039"/>
+            <a:ext cx="11338560" cy="457200"/>
+          </a:xfrm>
+          <a:prstGeom prst="rect">
+            <a:avLst/>
+          </a:prstGeom>
+          <a:noFill/>
+        </p:spPr>
+        <p:txBody>
+          <a:bodyPr wrap="square" lIns="0" rIns="0" tIns="0" bIns="0">
+            <a:spAutoFit/>
+          </a:bodyPr>
+          <a:lstStyle/>
+          <a:p>
+            <a:pPr algn="l"/>
+            <a:r>
+              <a:rPr sz="1300" b="0">
                 <a:solidFill>
                   <a:srgbClr val="3D2200"/>
                 </a:solidFill>
                 <a:latin typeface="Hiragino Sans"/>
               </a:rPr>
-              <a:t>• [ ] **見学会情報の登録**（5月以降の予定を3件以上）</a:t>
-            </a:r>
-          </a:p>
-        </p:txBody>
-      </p:sp>
-      <p:sp>
-        <p:nvSpPr>
-          <p:cNvPr id="8" name="TextBox 7"/>
-          <p:cNvSpPr txBox="1"/>
-          <p:nvPr/>
-        </p:nvSpPr>
-        <p:spPr>
-          <a:xfrm>
-            <a:off x="365760" y="2752344"/>
-            <a:ext cx="11430000" cy="457200"/>
-          </a:xfrm>
-          <a:prstGeom prst="rect">
-            <a:avLst/>
-          </a:prstGeom>
-          <a:noFill/>
-        </p:spPr>
-        <p:txBody>
-          <a:bodyPr wrap="square" lIns="0" rIns="0" tIns="0" bIns="0">
-            <a:spAutoFit/>
-          </a:bodyPr>
-          <a:lstStyle/>
-          <a:p>
-            <a:pPr algn="l"/>
-            <a:r>
-              <a:rPr sz="1800" b="1">
-                <a:solidFill>
-                  <a:srgbClr val="3D2200"/>
-                </a:solidFill>
-                <a:latin typeface="Hiragino Sans"/>
-              </a:rPr>
-              <a:t>リリース後（運用開始後）</a:t>
-            </a:r>
-          </a:p>
-        </p:txBody>
-      </p:sp>
-      <p:sp>
-        <p:nvSpPr>
-          <p:cNvPr id="9" name="TextBox 8"/>
-          <p:cNvSpPr txBox="1"/>
-          <p:nvPr/>
-        </p:nvSpPr>
-        <p:spPr>
-          <a:xfrm>
-            <a:off x="640080" y="3255263"/>
-            <a:ext cx="11155680" cy="384048"/>
-          </a:xfrm>
-          <a:prstGeom prst="rect">
-            <a:avLst/>
-          </a:prstGeom>
-          <a:noFill/>
-        </p:spPr>
-        <p:txBody>
-          <a:bodyPr wrap="square" lIns="0" rIns="0" tIns="0" bIns="0">
-            <a:spAutoFit/>
-          </a:bodyPr>
-          <a:lstStyle/>
-          <a:p>
-            <a:pPr algn="l"/>
-            <a:r>
-              <a:rPr sz="1200" b="0">
-                <a:solidFill>
-                  <a:srgbClr val="3D2200"/>
-                </a:solidFill>
-                <a:latin typeface="Hiragino Sans"/>
-              </a:rPr>
-              <a:t>• [ ] 見学会予約が入ったら **24時間以内にユーザーへご連絡**</a:t>
-            </a:r>
-          </a:p>
-        </p:txBody>
-      </p:sp>
-      <p:sp>
-        <p:nvSpPr>
-          <p:cNvPr id="10" name="TextBox 9"/>
-          <p:cNvSpPr txBox="1"/>
-          <p:nvPr/>
-        </p:nvSpPr>
-        <p:spPr>
-          <a:xfrm>
-            <a:off x="640080" y="3639311"/>
-            <a:ext cx="11155680" cy="384048"/>
-          </a:xfrm>
-          <a:prstGeom prst="rect">
-            <a:avLst/>
-          </a:prstGeom>
-          <a:noFill/>
-        </p:spPr>
-        <p:txBody>
-          <a:bodyPr wrap="square" lIns="0" rIns="0" tIns="0" bIns="0">
-            <a:spAutoFit/>
-          </a:bodyPr>
-          <a:lstStyle/>
-          <a:p>
-            <a:pPr algn="l"/>
-            <a:r>
-              <a:rPr sz="1200" b="0">
-                <a:solidFill>
-                  <a:srgbClr val="3D2200"/>
-                </a:solidFill>
-                <a:latin typeface="Hiragino Sans"/>
-              </a:rPr>
-              <a:t>• [ ] 月次で予約の成約可否をご共有</a:t>
-            </a:r>
-          </a:p>
-        </p:txBody>
-      </p:sp>
-      <p:sp>
-        <p:nvSpPr>
-          <p:cNvPr id="11" name="TextBox 10"/>
-          <p:cNvSpPr txBox="1"/>
-          <p:nvPr/>
-        </p:nvSpPr>
-        <p:spPr>
-          <a:xfrm>
-            <a:off x="640080" y="4023359"/>
-            <a:ext cx="11155680" cy="384048"/>
-          </a:xfrm>
-          <a:prstGeom prst="rect">
-            <a:avLst/>
-          </a:prstGeom>
-          <a:noFill/>
-        </p:spPr>
-        <p:txBody>
-          <a:bodyPr wrap="square" lIns="0" rIns="0" tIns="0" bIns="0">
-            <a:spAutoFit/>
-          </a:bodyPr>
-          <a:lstStyle/>
-          <a:p>
-            <a:pPr algn="l"/>
-            <a:r>
-              <a:rPr sz="1200" b="0">
-                <a:solidFill>
-                  <a:srgbClr val="3D2200"/>
-                </a:solidFill>
-                <a:latin typeface="Hiragino Sans"/>
-              </a:rPr>
-              <a:t>• [ ] Phase 2 の撮影プランに興味がある旨の事前ご連絡</a:t>
+              <a:t>Phase 4 (2026/12/01〜2027/02/28): 匿名AI質問・ウェビナー・マガジン復活、SaaS プラン開始 (¥50,000/月・¥150,000/月)</a:t>
             </a:r>
           </a:p>
         </p:txBody>
@@ -4298,7 +4057,42 @@
                 </a:solidFill>
                 <a:latin typeface="Hiragino Sans"/>
               </a:rPr>
-              <a:t>5. お願いしたいこと  (2/2)</a:t>
+              <a:t>6. フェーズ別 機能追加スケジュール  (2/2)</a:t>
+            </a:r>
+          </a:p>
+        </p:txBody>
+      </p:sp>
+      <p:sp>
+        <p:nvSpPr>
+          <p:cNvPr id="4" name="TextBox 3"/>
+          <p:cNvSpPr txBox="1"/>
+          <p:nvPr/>
+        </p:nvSpPr>
+        <p:spPr>
+          <a:xfrm>
+            <a:off x="457200" y="1097280"/>
+            <a:ext cx="11338560" cy="457200"/>
+          </a:xfrm>
+          <a:prstGeom prst="rect">
+            <a:avLst/>
+          </a:prstGeom>
+          <a:noFill/>
+        </p:spPr>
+        <p:txBody>
+          <a:bodyPr wrap="square" lIns="0" rIns="0" tIns="0" bIns="0">
+            <a:spAutoFit/>
+          </a:bodyPr>
+          <a:lstStyle/>
+          <a:p>
+            <a:pPr algn="l"/>
+            <a:r>
+              <a:rPr sz="1300" b="0">
+                <a:solidFill>
+                  <a:srgbClr val="3D2200"/>
+                </a:solidFill>
+                <a:latin typeface="Hiragino Sans"/>
+              </a:rPr>
+              <a:t>Phase 5 (2027/03〜): 全国の工務店追加、全国マーケティング開始</a:t>
             </a:r>
           </a:p>
         </p:txBody>
@@ -4394,7 +4188,7 @@
                 </a:solidFill>
                 <a:latin typeface="Hiragino Sans"/>
               </a:rPr>
-              <a:t>6. よくある質問（抜粋）  (1/3)</a:t>
+              <a:t>7. 料金プラン (全員同一)  (1/2)</a:t>
             </a:r>
           </a:p>
         </p:txBody>
@@ -4407,29 +4201,29 @@
         </p:nvSpPr>
         <p:spPr>
           <a:xfrm>
-            <a:off x="457200" y="1097280"/>
-            <a:ext cx="11338560" cy="457200"/>
-          </a:xfrm>
-          <a:prstGeom prst="rect">
-            <a:avLst/>
-          </a:prstGeom>
-          <a:noFill/>
-        </p:spPr>
-        <p:txBody>
-          <a:bodyPr wrap="square" lIns="0" rIns="0" tIns="0" bIns="0">
-            <a:spAutoFit/>
-          </a:bodyPr>
-          <a:lstStyle/>
-          <a:p>
-            <a:pPr algn="l"/>
-            <a:r>
-              <a:rPr sz="1300" b="0">
+            <a:off x="365760" y="1097280"/>
+            <a:ext cx="11430000" cy="457200"/>
+          </a:xfrm>
+          <a:prstGeom prst="rect">
+            <a:avLst/>
+          </a:prstGeom>
+          <a:noFill/>
+        </p:spPr>
+        <p:txBody>
+          <a:bodyPr wrap="square" lIns="0" rIns="0" tIns="0" bIns="0">
+            <a:spAutoFit/>
+          </a:bodyPr>
+          <a:lstStyle/>
+          <a:p>
+            <a:pPr algn="l"/>
+            <a:r>
+              <a:rPr sz="1800" b="1">
                 <a:solidFill>
                   <a:srgbClr val="3D2200"/>
                 </a:solidFill>
                 <a:latin typeface="Hiragino Sans"/>
               </a:rPr>
-              <a:t>詳細は `工務店FAQ_MVP版.md` をご確認ください。</a:t>
+              <a:t>Phase 1 (5〜6月)</a:t>
             </a:r>
           </a:p>
         </p:txBody>
@@ -4442,7 +4236,112 @@
         </p:nvSpPr>
         <p:spPr>
           <a:xfrm>
-            <a:off x="365760" y="1600200"/>
+            <a:off x="640080" y="1600200"/>
+            <a:ext cx="11155680" cy="384048"/>
+          </a:xfrm>
+          <a:prstGeom prst="rect">
+            <a:avLst/>
+          </a:prstGeom>
+          <a:noFill/>
+        </p:spPr>
+        <p:txBody>
+          <a:bodyPr wrap="square" lIns="0" rIns="0" tIns="0" bIns="0">
+            <a:spAutoFit/>
+          </a:bodyPr>
+          <a:lstStyle/>
+          <a:p>
+            <a:pPr algn="l"/>
+            <a:r>
+              <a:rPr sz="1200" b="0">
+                <a:solidFill>
+                  <a:srgbClr val="3D2200"/>
+                </a:solidFill>
+                <a:latin typeface="Hiragino Sans"/>
+              </a:rPr>
+              <a:t>• 見学会予約 ¥50,000/件 (税別、全員同一)</a:t>
+            </a:r>
+          </a:p>
+        </p:txBody>
+      </p:sp>
+      <p:sp>
+        <p:nvSpPr>
+          <p:cNvPr id="6" name="TextBox 5"/>
+          <p:cNvSpPr txBox="1"/>
+          <p:nvPr/>
+        </p:nvSpPr>
+        <p:spPr>
+          <a:xfrm>
+            <a:off x="640080" y="1984248"/>
+            <a:ext cx="11155680" cy="384048"/>
+          </a:xfrm>
+          <a:prstGeom prst="rect">
+            <a:avLst/>
+          </a:prstGeom>
+          <a:noFill/>
+        </p:spPr>
+        <p:txBody>
+          <a:bodyPr wrap="square" lIns="0" rIns="0" tIns="0" bIns="0">
+            <a:spAutoFit/>
+          </a:bodyPr>
+          <a:lstStyle/>
+          <a:p>
+            <a:pPr algn="l"/>
+            <a:r>
+              <a:rPr sz="1200" b="0">
+                <a:solidFill>
+                  <a:srgbClr val="3D2200"/>
+                </a:solidFill>
+                <a:latin typeface="Hiragino Sans"/>
+              </a:rPr>
+              <a:t>• 成果報酬: Phase 3 から導入 (それまで未発生)</a:t>
+            </a:r>
+          </a:p>
+        </p:txBody>
+      </p:sp>
+      <p:sp>
+        <p:nvSpPr>
+          <p:cNvPr id="7" name="TextBox 6"/>
+          <p:cNvSpPr txBox="1"/>
+          <p:nvPr/>
+        </p:nvSpPr>
+        <p:spPr>
+          <a:xfrm>
+            <a:off x="640080" y="2368296"/>
+            <a:ext cx="11155680" cy="384048"/>
+          </a:xfrm>
+          <a:prstGeom prst="rect">
+            <a:avLst/>
+          </a:prstGeom>
+          <a:noFill/>
+        </p:spPr>
+        <p:txBody>
+          <a:bodyPr wrap="square" lIns="0" rIns="0" tIns="0" bIns="0">
+            <a:spAutoFit/>
+          </a:bodyPr>
+          <a:lstStyle/>
+          <a:p>
+            <a:pPr algn="l"/>
+            <a:r>
+              <a:rPr sz="1200" b="0">
+                <a:solidFill>
+                  <a:srgbClr val="3D2200"/>
+                </a:solidFill>
+                <a:latin typeface="Hiragino Sans"/>
+              </a:rPr>
+              <a:t>• AI診断・無料相談・会員登録はユーザー無料</a:t>
+            </a:r>
+          </a:p>
+        </p:txBody>
+      </p:sp>
+      <p:sp>
+        <p:nvSpPr>
+          <p:cNvPr id="8" name="TextBox 7"/>
+          <p:cNvSpPr txBox="1"/>
+          <p:nvPr/>
+        </p:nvSpPr>
+        <p:spPr>
+          <a:xfrm>
+            <a:off x="365760" y="2752344"/>
             <a:ext cx="11430000" cy="457200"/>
           </a:xfrm>
           <a:prstGeom prst="rect">
@@ -4464,55 +4363,90 @@
                 </a:solidFill>
                 <a:latin typeface="Hiragino Sans"/>
               </a:rPr>
-              <a:t>Q1. 現在見られている記事ページは全部消えるのですか？</a:t>
-            </a:r>
-          </a:p>
-        </p:txBody>
-      </p:sp>
-      <p:sp>
-        <p:nvSpPr>
-          <p:cNvPr id="6" name="TextBox 5"/>
-          <p:cNvSpPr txBox="1"/>
-          <p:nvPr/>
-        </p:nvSpPr>
-        <p:spPr>
-          <a:xfrm>
-            <a:off x="457200" y="2103120"/>
-            <a:ext cx="11338560" cy="457200"/>
-          </a:xfrm>
-          <a:prstGeom prst="rect">
-            <a:avLst/>
-          </a:prstGeom>
-          <a:noFill/>
-        </p:spPr>
-        <p:txBody>
-          <a:bodyPr wrap="square" lIns="0" rIns="0" tIns="0" bIns="0">
-            <a:spAutoFit/>
-          </a:bodyPr>
-          <a:lstStyle/>
-          <a:p>
-            <a:pPr algn="l"/>
-            <a:r>
-              <a:rPr sz="1300" b="0">
+              <a:t>Phase 2 (7〜8月)</a:t>
+            </a:r>
+          </a:p>
+        </p:txBody>
+      </p:sp>
+      <p:sp>
+        <p:nvSpPr>
+          <p:cNvPr id="9" name="TextBox 8"/>
+          <p:cNvSpPr txBox="1"/>
+          <p:nvPr/>
+        </p:nvSpPr>
+        <p:spPr>
+          <a:xfrm>
+            <a:off x="640080" y="3255263"/>
+            <a:ext cx="11155680" cy="384048"/>
+          </a:xfrm>
+          <a:prstGeom prst="rect">
+            <a:avLst/>
+          </a:prstGeom>
+          <a:noFill/>
+        </p:spPr>
+        <p:txBody>
+          <a:bodyPr wrap="square" lIns="0" rIns="0" tIns="0" bIns="0">
+            <a:spAutoFit/>
+          </a:bodyPr>
+          <a:lstStyle/>
+          <a:p>
+            <a:pPr algn="l"/>
+            <a:r>
+              <a:rPr sz="1200" b="0">
                 <a:solidFill>
                   <a:srgbClr val="3D2200"/>
                 </a:solidFill>
                 <a:latin typeface="Hiragino Sans"/>
               </a:rPr>
-              <a:t>A. いいえ、**一時的に非公開**です。Phase 2（7月）から順次復活します。 コードとデータは全て残してあります。</a:t>
-            </a:r>
-          </a:p>
-        </p:txBody>
-      </p:sp>
-      <p:sp>
-        <p:nvSpPr>
-          <p:cNvPr id="7" name="TextBox 6"/>
-          <p:cNvSpPr txBox="1"/>
-          <p:nvPr/>
-        </p:nvSpPr>
-        <p:spPr>
-          <a:xfrm>
-            <a:off x="365760" y="2606039"/>
+              <a:t>• 見学会予約 ¥50,000/件 (継続)</a:t>
+            </a:r>
+          </a:p>
+        </p:txBody>
+      </p:sp>
+      <p:sp>
+        <p:nvSpPr>
+          <p:cNvPr id="10" name="TextBox 9"/>
+          <p:cNvSpPr txBox="1"/>
+          <p:nvPr/>
+        </p:nvSpPr>
+        <p:spPr>
+          <a:xfrm>
+            <a:off x="640080" y="3639311"/>
+            <a:ext cx="11155680" cy="384048"/>
+          </a:xfrm>
+          <a:prstGeom prst="rect">
+            <a:avLst/>
+          </a:prstGeom>
+          <a:noFill/>
+        </p:spPr>
+        <p:txBody>
+          <a:bodyPr wrap="square" lIns="0" rIns="0" tIns="0" bIns="0">
+            <a:spAutoFit/>
+          </a:bodyPr>
+          <a:lstStyle/>
+          <a:p>
+            <a:pPr algn="l"/>
+            <a:r>
+              <a:rPr sz="1200" b="0">
+                <a:solidFill>
+                  <a:srgbClr val="3D2200"/>
+                </a:solidFill>
+                <a:latin typeface="Hiragino Sans"/>
+              </a:rPr>
+              <a:t>• ルームツアー動画撮影 ¥150,000/本 (税別、全員同一)</a:t>
+            </a:r>
+          </a:p>
+        </p:txBody>
+      </p:sp>
+      <p:sp>
+        <p:nvSpPr>
+          <p:cNvPr id="11" name="TextBox 10"/>
+          <p:cNvSpPr txBox="1"/>
+          <p:nvPr/>
+        </p:nvSpPr>
+        <p:spPr>
+          <a:xfrm>
+            <a:off x="365760" y="4023359"/>
             <a:ext cx="11430000" cy="457200"/>
           </a:xfrm>
           <a:prstGeom prst="rect">
@@ -4534,42 +4468,7 @@
                 </a:solidFill>
                 <a:latin typeface="Hiragino Sans"/>
               </a:rPr>
-              <a:t>Q2. Phase 2 以降で料金が上がると聞きましたが、本当に常に半額ですか？</a:t>
-            </a:r>
-          </a:p>
-        </p:txBody>
-      </p:sp>
-      <p:sp>
-        <p:nvSpPr>
-          <p:cNvPr id="8" name="TextBox 7"/>
-          <p:cNvSpPr txBox="1"/>
-          <p:nvPr/>
-        </p:nvSpPr>
-        <p:spPr>
-          <a:xfrm>
-            <a:off x="457200" y="3108959"/>
-            <a:ext cx="11338560" cy="457200"/>
-          </a:xfrm>
-          <a:prstGeom prst="rect">
-            <a:avLst/>
-          </a:prstGeom>
-          <a:noFill/>
-        </p:spPr>
-        <p:txBody>
-          <a:bodyPr wrap="square" lIns="0" rIns="0" tIns="0" bIns="0">
-            <a:spAutoFit/>
-          </a:bodyPr>
-          <a:lstStyle/>
-          <a:p>
-            <a:pPr algn="l"/>
-            <a:r>
-              <a:rPr sz="1300" b="0">
-                <a:solidFill>
-                  <a:srgbClr val="3D2200"/>
-                </a:solidFill>
-                <a:latin typeface="Hiragino Sans"/>
-              </a:rPr>
-              <a:t>A. はい、御社は「実績づくりご協力社」として **永続的に 50% OFF** です。 契約書に明文化します。</a:t>
+              <a:t>Phase 3 (9〜11月)</a:t>
             </a:r>
           </a:p>
         </p:txBody>
@@ -4665,7 +4564,7 @@
                 </a:solidFill>
                 <a:latin typeface="Hiragino Sans"/>
               </a:rPr>
-              <a:t>6. よくある質問（抜粋）  (2/3)</a:t>
+              <a:t>7. 料金プラン (全員同一)  (2/2)</a:t>
             </a:r>
           </a:p>
         </p:txBody>
@@ -4678,7 +4577,182 @@
         </p:nvSpPr>
         <p:spPr>
           <a:xfrm>
-            <a:off x="365760" y="1097280"/>
+            <a:off x="640080" y="1097280"/>
+            <a:ext cx="11155680" cy="384048"/>
+          </a:xfrm>
+          <a:prstGeom prst="rect">
+            <a:avLst/>
+          </a:prstGeom>
+          <a:noFill/>
+        </p:spPr>
+        <p:txBody>
+          <a:bodyPr wrap="square" lIns="0" rIns="0" tIns="0" bIns="0">
+            <a:spAutoFit/>
+          </a:bodyPr>
+          <a:lstStyle/>
+          <a:p>
+            <a:pPr algn="l"/>
+            <a:r>
+              <a:rPr sz="1200" b="0">
+                <a:solidFill>
+                  <a:srgbClr val="3D2200"/>
+                </a:solidFill>
+                <a:latin typeface="Hiragino Sans"/>
+              </a:rPr>
+              <a:t>• 見学会予約 ¥50,000/件</a:t>
+            </a:r>
+          </a:p>
+        </p:txBody>
+      </p:sp>
+      <p:sp>
+        <p:nvSpPr>
+          <p:cNvPr id="5" name="TextBox 4"/>
+          <p:cNvSpPr txBox="1"/>
+          <p:nvPr/>
+        </p:nvSpPr>
+        <p:spPr>
+          <a:xfrm>
+            <a:off x="640080" y="1481328"/>
+            <a:ext cx="11155680" cy="384048"/>
+          </a:xfrm>
+          <a:prstGeom prst="rect">
+            <a:avLst/>
+          </a:prstGeom>
+          <a:noFill/>
+        </p:spPr>
+        <p:txBody>
+          <a:bodyPr wrap="square" lIns="0" rIns="0" tIns="0" bIns="0">
+            <a:spAutoFit/>
+          </a:bodyPr>
+          <a:lstStyle/>
+          <a:p>
+            <a:pPr algn="l"/>
+            <a:r>
+              <a:rPr sz="1200" b="0">
+                <a:solidFill>
+                  <a:srgbClr val="3D2200"/>
+                </a:solidFill>
+                <a:latin typeface="Hiragino Sans"/>
+              </a:rPr>
+              <a:t>• 撮影プラン ¥150,000/本</a:t>
+            </a:r>
+          </a:p>
+        </p:txBody>
+      </p:sp>
+      <p:sp>
+        <p:nvSpPr>
+          <p:cNvPr id="6" name="TextBox 5"/>
+          <p:cNvSpPr txBox="1"/>
+          <p:nvPr/>
+        </p:nvSpPr>
+        <p:spPr>
+          <a:xfrm>
+            <a:off x="640080" y="1865376"/>
+            <a:ext cx="11155680" cy="384048"/>
+          </a:xfrm>
+          <a:prstGeom prst="rect">
+            <a:avLst/>
+          </a:prstGeom>
+          <a:noFill/>
+        </p:spPr>
+        <p:txBody>
+          <a:bodyPr wrap="square" lIns="0" rIns="0" tIns="0" bIns="0">
+            <a:spAutoFit/>
+          </a:bodyPr>
+          <a:lstStyle/>
+          <a:p>
+            <a:pPr algn="l"/>
+            <a:r>
+              <a:rPr sz="1200" b="0">
+                <a:solidFill>
+                  <a:srgbClr val="3D2200"/>
+                </a:solidFill>
+                <a:latin typeface="Hiragino Sans"/>
+              </a:rPr>
+              <a:t>• 月額掲載プラン ベーシック ¥30,000/月 (物件 3 件まで)</a:t>
+            </a:r>
+          </a:p>
+        </p:txBody>
+      </p:sp>
+      <p:sp>
+        <p:nvSpPr>
+          <p:cNvPr id="7" name="TextBox 6"/>
+          <p:cNvSpPr txBox="1"/>
+          <p:nvPr/>
+        </p:nvSpPr>
+        <p:spPr>
+          <a:xfrm>
+            <a:off x="640080" y="2249424"/>
+            <a:ext cx="11155680" cy="384048"/>
+          </a:xfrm>
+          <a:prstGeom prst="rect">
+            <a:avLst/>
+          </a:prstGeom>
+          <a:noFill/>
+        </p:spPr>
+        <p:txBody>
+          <a:bodyPr wrap="square" lIns="0" rIns="0" tIns="0" bIns="0">
+            <a:spAutoFit/>
+          </a:bodyPr>
+          <a:lstStyle/>
+          <a:p>
+            <a:pPr algn="l"/>
+            <a:r>
+              <a:rPr sz="1200" b="0">
+                <a:solidFill>
+                  <a:srgbClr val="3D2200"/>
+                </a:solidFill>
+                <a:latin typeface="Hiragino Sans"/>
+              </a:rPr>
+              <a:t>• 月額掲載プラン プロ ¥80,000/月 (物件無制限 + 特集枠)</a:t>
+            </a:r>
+          </a:p>
+        </p:txBody>
+      </p:sp>
+      <p:sp>
+        <p:nvSpPr>
+          <p:cNvPr id="8" name="TextBox 7"/>
+          <p:cNvSpPr txBox="1"/>
+          <p:nvPr/>
+        </p:nvSpPr>
+        <p:spPr>
+          <a:xfrm>
+            <a:off x="640080" y="2633472"/>
+            <a:ext cx="11155680" cy="384048"/>
+          </a:xfrm>
+          <a:prstGeom prst="rect">
+            <a:avLst/>
+          </a:prstGeom>
+          <a:noFill/>
+        </p:spPr>
+        <p:txBody>
+          <a:bodyPr wrap="square" lIns="0" rIns="0" tIns="0" bIns="0">
+            <a:spAutoFit/>
+          </a:bodyPr>
+          <a:lstStyle/>
+          <a:p>
+            <a:pPr algn="l"/>
+            <a:r>
+              <a:rPr sz="1200" b="0">
+                <a:solidFill>
+                  <a:srgbClr val="3D2200"/>
+                </a:solidFill>
+                <a:latin typeface="Hiragino Sans"/>
+              </a:rPr>
+              <a:t>• 成果報酬 3% (上限なし) 導入</a:t>
+            </a:r>
+          </a:p>
+        </p:txBody>
+      </p:sp>
+      <p:sp>
+        <p:nvSpPr>
+          <p:cNvPr id="9" name="TextBox 8"/>
+          <p:cNvSpPr txBox="1"/>
+          <p:nvPr/>
+        </p:nvSpPr>
+        <p:spPr>
+          <a:xfrm>
+            <a:off x="365760" y="3017520"/>
             <a:ext cx="11430000" cy="457200"/>
           </a:xfrm>
           <a:prstGeom prst="rect">
@@ -4700,147 +4774,42 @@
                 </a:solidFill>
                 <a:latin typeface="Hiragino Sans"/>
               </a:rPr>
-              <a:t>Q3. 他の工務店より不利にならないか心配です</a:t>
-            </a:r>
-          </a:p>
-        </p:txBody>
-      </p:sp>
-      <p:sp>
-        <p:nvSpPr>
-          <p:cNvPr id="5" name="TextBox 4"/>
-          <p:cNvSpPr txBox="1"/>
-          <p:nvPr/>
-        </p:nvSpPr>
-        <p:spPr>
-          <a:xfrm>
-            <a:off x="457200" y="1600200"/>
-            <a:ext cx="11338560" cy="457200"/>
-          </a:xfrm>
-          <a:prstGeom prst="rect">
-            <a:avLst/>
-          </a:prstGeom>
-          <a:noFill/>
-        </p:spPr>
-        <p:txBody>
-          <a:bodyPr wrap="square" lIns="0" rIns="0" tIns="0" bIns="0">
-            <a:spAutoFit/>
-          </a:bodyPr>
-          <a:lstStyle/>
-          <a:p>
-            <a:pPr algn="l"/>
-            <a:r>
-              <a:rPr sz="1300" b="0">
+              <a:t>Phase 4 以降</a:t>
+            </a:r>
+          </a:p>
+        </p:txBody>
+      </p:sp>
+      <p:sp>
+        <p:nvSpPr>
+          <p:cNvPr id="10" name="TextBox 9"/>
+          <p:cNvSpPr txBox="1"/>
+          <p:nvPr/>
+        </p:nvSpPr>
+        <p:spPr>
+          <a:xfrm>
+            <a:off x="640080" y="3520439"/>
+            <a:ext cx="11155680" cy="384048"/>
+          </a:xfrm>
+          <a:prstGeom prst="rect">
+            <a:avLst/>
+          </a:prstGeom>
+          <a:noFill/>
+        </p:spPr>
+        <p:txBody>
+          <a:bodyPr wrap="square" lIns="0" rIns="0" tIns="0" bIns="0">
+            <a:spAutoFit/>
+          </a:bodyPr>
+          <a:lstStyle/>
+          <a:p>
+            <a:pPr algn="l"/>
+            <a:r>
+              <a:rPr sz="1200" b="0">
                 <a:solidFill>
                   <a:srgbClr val="3D2200"/>
                 </a:solidFill>
                 <a:latin typeface="Hiragino Sans"/>
               </a:rPr>
-              <a:t>A. 既存10社様は **優先送客** の対象です。 AI診断の結果表示や見学会予約フォームで、既存10社様を先頭に表示する仕様です。</a:t>
-            </a:r>
-          </a:p>
-        </p:txBody>
-      </p:sp>
-      <p:sp>
-        <p:nvSpPr>
-          <p:cNvPr id="6" name="TextBox 5"/>
-          <p:cNvSpPr txBox="1"/>
-          <p:nvPr/>
-        </p:nvSpPr>
-        <p:spPr>
-          <a:xfrm>
-            <a:off x="365760" y="2103120"/>
-            <a:ext cx="11430000" cy="457200"/>
-          </a:xfrm>
-          <a:prstGeom prst="rect">
-            <a:avLst/>
-          </a:prstGeom>
-          <a:noFill/>
-        </p:spPr>
-        <p:txBody>
-          <a:bodyPr wrap="square" lIns="0" rIns="0" tIns="0" bIns="0">
-            <a:spAutoFit/>
-          </a:bodyPr>
-          <a:lstStyle/>
-          <a:p>
-            <a:pPr algn="l"/>
-            <a:r>
-              <a:rPr sz="1800" b="1">
-                <a:solidFill>
-                  <a:srgbClr val="3D2200"/>
-                </a:solidFill>
-                <a:latin typeface="Hiragino Sans"/>
-              </a:rPr>
-              <a:t>Q4. Phase 1 中の見学会予約は本当に無料ですか？</a:t>
-            </a:r>
-          </a:p>
-        </p:txBody>
-      </p:sp>
-      <p:sp>
-        <p:nvSpPr>
-          <p:cNvPr id="7" name="TextBox 6"/>
-          <p:cNvSpPr txBox="1"/>
-          <p:nvPr/>
-        </p:nvSpPr>
-        <p:spPr>
-          <a:xfrm>
-            <a:off x="457200" y="2606039"/>
-            <a:ext cx="11338560" cy="457200"/>
-          </a:xfrm>
-          <a:prstGeom prst="rect">
-            <a:avLst/>
-          </a:prstGeom>
-          <a:noFill/>
-        </p:spPr>
-        <p:txBody>
-          <a:bodyPr wrap="square" lIns="0" rIns="0" tIns="0" bIns="0">
-            <a:spAutoFit/>
-          </a:bodyPr>
-          <a:lstStyle/>
-          <a:p>
-            <a:pPr algn="l"/>
-            <a:r>
-              <a:rPr sz="1300" b="0">
-                <a:solidFill>
-                  <a:srgbClr val="3D2200"/>
-                </a:solidFill>
-                <a:latin typeface="Hiragino Sans"/>
-              </a:rPr>
-              <a:t>A. はい、5/1〜6/30 の2ヶ月間は **完全無料**（運用検証のため）。 成果報酬 1.5% のみ発生します。</a:t>
-            </a:r>
-          </a:p>
-        </p:txBody>
-      </p:sp>
-      <p:sp>
-        <p:nvSpPr>
-          <p:cNvPr id="8" name="TextBox 7"/>
-          <p:cNvSpPr txBox="1"/>
-          <p:nvPr/>
-        </p:nvSpPr>
-        <p:spPr>
-          <a:xfrm>
-            <a:off x="365760" y="3108959"/>
-            <a:ext cx="11430000" cy="457200"/>
-          </a:xfrm>
-          <a:prstGeom prst="rect">
-            <a:avLst/>
-          </a:prstGeom>
-          <a:noFill/>
-        </p:spPr>
-        <p:txBody>
-          <a:bodyPr wrap="square" lIns="0" rIns="0" tIns="0" bIns="0">
-            <a:spAutoFit/>
-          </a:bodyPr>
-          <a:lstStyle/>
-          <a:p>
-            <a:pPr algn="l"/>
-            <a:r>
-              <a:rPr sz="1800" b="1">
-                <a:solidFill>
-                  <a:srgbClr val="3D2200"/>
-                </a:solidFill>
-                <a:latin typeface="Hiragino Sans"/>
-              </a:rPr>
-              <a:t>Q5. 連絡窓口はどこですか？</a:t>
+              <a:t>• SaaS ライト ¥50,000/月 / プロ ¥150,000/月</a:t>
             </a:r>
           </a:p>
         </p:txBody>
@@ -4936,7 +4905,7 @@
                 </a:solidFill>
                 <a:latin typeface="Hiragino Sans"/>
               </a:rPr>
-              <a:t>6. よくある質問（抜粋）  (3/3)</a:t>
+              <a:t>8. 成果報酬 3% の発生条件 (Phase 3 から)  (1/2)</a:t>
             </a:r>
           </a:p>
         </p:txBody>
@@ -4971,7 +4940,147 @@
                 </a:solidFill>
                 <a:latin typeface="Hiragino Sans"/>
               </a:rPr>
-              <a:t>A. 担当営業（弊社担当）または `support@payhome.jp` までご連絡ください。</a:t>
+              <a:t>発生する: 以下 3 条件のいずれかに該当する成約</a:t>
+            </a:r>
+          </a:p>
+        </p:txBody>
+      </p:sp>
+      <p:sp>
+        <p:nvSpPr>
+          <p:cNvPr id="5" name="TextBox 4"/>
+          <p:cNvSpPr txBox="1"/>
+          <p:nvPr/>
+        </p:nvSpPr>
+        <p:spPr>
+          <a:xfrm>
+            <a:off x="640080" y="1600200"/>
+            <a:ext cx="11155680" cy="384048"/>
+          </a:xfrm>
+          <a:prstGeom prst="rect">
+            <a:avLst/>
+          </a:prstGeom>
+          <a:noFill/>
+        </p:spPr>
+        <p:txBody>
+          <a:bodyPr wrap="square" lIns="0" rIns="0" tIns="0" bIns="0">
+            <a:spAutoFit/>
+          </a:bodyPr>
+          <a:lstStyle/>
+          <a:p>
+            <a:pPr algn="l"/>
+            <a:r>
+              <a:rPr sz="1200" b="0">
+                <a:solidFill>
+                  <a:srgbClr val="3D2200"/>
+                </a:solidFill>
+                <a:latin typeface="Hiragino Sans"/>
+              </a:rPr>
+              <a:t>• 無料相談 (/consultation) 経由で紹介 → 成約</a:t>
+            </a:r>
+          </a:p>
+        </p:txBody>
+      </p:sp>
+      <p:sp>
+        <p:nvSpPr>
+          <p:cNvPr id="6" name="TextBox 5"/>
+          <p:cNvSpPr txBox="1"/>
+          <p:nvPr/>
+        </p:nvSpPr>
+        <p:spPr>
+          <a:xfrm>
+            <a:off x="640080" y="1984248"/>
+            <a:ext cx="11155680" cy="384048"/>
+          </a:xfrm>
+          <a:prstGeom prst="rect">
+            <a:avLst/>
+          </a:prstGeom>
+          <a:noFill/>
+        </p:spPr>
+        <p:txBody>
+          <a:bodyPr wrap="square" lIns="0" rIns="0" tIns="0" bIns="0">
+            <a:spAutoFit/>
+          </a:bodyPr>
+          <a:lstStyle/>
+          <a:p>
+            <a:pPr algn="l"/>
+            <a:r>
+              <a:rPr sz="1200" b="0">
+                <a:solidFill>
+                  <a:srgbClr val="3D2200"/>
+                </a:solidFill>
+                <a:latin typeface="Hiragino Sans"/>
+              </a:rPr>
+              <a:t>• AI家づくり診断 (/diagnosis) 完了 → マッチング → 成約</a:t>
+            </a:r>
+          </a:p>
+        </p:txBody>
+      </p:sp>
+      <p:sp>
+        <p:nvSpPr>
+          <p:cNvPr id="7" name="TextBox 6"/>
+          <p:cNvSpPr txBox="1"/>
+          <p:nvPr/>
+        </p:nvSpPr>
+        <p:spPr>
+          <a:xfrm>
+            <a:off x="640080" y="2368296"/>
+            <a:ext cx="11155680" cy="384048"/>
+          </a:xfrm>
+          <a:prstGeom prst="rect">
+            <a:avLst/>
+          </a:prstGeom>
+          <a:noFill/>
+        </p:spPr>
+        <p:txBody>
+          <a:bodyPr wrap="square" lIns="0" rIns="0" tIns="0" bIns="0">
+            <a:spAutoFit/>
+          </a:bodyPr>
+          <a:lstStyle/>
+          <a:p>
+            <a:pPr algn="l"/>
+            <a:r>
+              <a:rPr sz="1200" b="0">
+                <a:solidFill>
+                  <a:srgbClr val="3D2200"/>
+                </a:solidFill>
+                <a:latin typeface="Hiragino Sans"/>
+              </a:rPr>
+              <a:t>• 会員登録済みユーザー (/signup 完了) の成約全般</a:t>
+            </a:r>
+          </a:p>
+        </p:txBody>
+      </p:sp>
+      <p:sp>
+        <p:nvSpPr>
+          <p:cNvPr id="8" name="TextBox 7"/>
+          <p:cNvSpPr txBox="1"/>
+          <p:nvPr/>
+        </p:nvSpPr>
+        <p:spPr>
+          <a:xfrm>
+            <a:off x="457200" y="2752344"/>
+            <a:ext cx="11338560" cy="457200"/>
+          </a:xfrm>
+          <a:prstGeom prst="rect">
+            <a:avLst/>
+          </a:prstGeom>
+          <a:noFill/>
+        </p:spPr>
+        <p:txBody>
+          <a:bodyPr wrap="square" lIns="0" rIns="0" tIns="0" bIns="0">
+            <a:spAutoFit/>
+          </a:bodyPr>
+          <a:lstStyle/>
+          <a:p>
+            <a:pPr algn="l"/>
+            <a:r>
+              <a:rPr sz="1300" b="0">
+                <a:solidFill>
+                  <a:srgbClr val="3D2200"/>
+                </a:solidFill>
+                <a:latin typeface="Hiragino Sans"/>
+              </a:rPr>
+              <a:t>発生しない: 非会員ユーザーの直接問合せ → 成約</a:t>
             </a:r>
           </a:p>
         </p:txBody>
@@ -5067,7 +5176,7 @@
                 </a:solidFill>
                 <a:latin typeface="Hiragino Sans"/>
               </a:rPr>
-              <a:t>7. リリース日と流れ</a:t>
+              <a:t>8. 成果報酬 3% の発生条件 (Phase 3 から)  (2/2)</a:t>
             </a:r>
           </a:p>
         </p:txBody>
@@ -5080,134 +5189,29 @@
         </p:nvSpPr>
         <p:spPr>
           <a:xfrm>
-            <a:off x="640080" y="1097280"/>
-            <a:ext cx="11155680" cy="384048"/>
-          </a:xfrm>
-          <a:prstGeom prst="rect">
-            <a:avLst/>
-          </a:prstGeom>
-          <a:noFill/>
-        </p:spPr>
-        <p:txBody>
-          <a:bodyPr wrap="square" lIns="0" rIns="0" tIns="0" bIns="0">
-            <a:spAutoFit/>
-          </a:bodyPr>
-          <a:lstStyle/>
-          <a:p>
-            <a:pPr algn="l"/>
-            <a:r>
-              <a:rPr sz="1200" b="0">
+            <a:off x="457200" y="1097280"/>
+            <a:ext cx="11338560" cy="457200"/>
+          </a:xfrm>
+          <a:prstGeom prst="rect">
+            <a:avLst/>
+          </a:prstGeom>
+          <a:noFill/>
+        </p:spPr>
+        <p:txBody>
+          <a:bodyPr wrap="square" lIns="0" rIns="0" tIns="0" bIns="0">
+            <a:spAutoFit/>
+          </a:bodyPr>
+          <a:lstStyle/>
+          <a:p>
+            <a:pPr algn="l"/>
+            <a:r>
+              <a:rPr sz="1300" b="0">
                 <a:solidFill>
                   <a:srgbClr val="3D2200"/>
                 </a:solidFill>
                 <a:latin typeface="Hiragino Sans"/>
               </a:rPr>
-              <a:t>• **2026/05/01 (金) AM 6:00** 本番リリース</a:t>
-            </a:r>
-          </a:p>
-        </p:txBody>
-      </p:sp>
-      <p:sp>
-        <p:nvSpPr>
-          <p:cNvPr id="5" name="TextBox 4"/>
-          <p:cNvSpPr txBox="1"/>
-          <p:nvPr/>
-        </p:nvSpPr>
-        <p:spPr>
-          <a:xfrm>
-            <a:off x="640080" y="1481328"/>
-            <a:ext cx="11155680" cy="384048"/>
-          </a:xfrm>
-          <a:prstGeom prst="rect">
-            <a:avLst/>
-          </a:prstGeom>
-          <a:noFill/>
-        </p:spPr>
-        <p:txBody>
-          <a:bodyPr wrap="square" lIns="0" rIns="0" tIns="0" bIns="0">
-            <a:spAutoFit/>
-          </a:bodyPr>
-          <a:lstStyle/>
-          <a:p>
-            <a:pPr algn="l"/>
-            <a:r>
-              <a:rPr sz="1200" b="0">
-                <a:solidFill>
-                  <a:srgbClr val="3D2200"/>
-                </a:solidFill>
-                <a:latin typeface="Hiragino Sans"/>
-              </a:rPr>
-              <a:t>• **2026/05/01 (金) AM 9:00** プレスリリース配信 + YouTube 告知動画公開</a:t>
-            </a:r>
-          </a:p>
-        </p:txBody>
-      </p:sp>
-      <p:sp>
-        <p:nvSpPr>
-          <p:cNvPr id="6" name="TextBox 5"/>
-          <p:cNvSpPr txBox="1"/>
-          <p:nvPr/>
-        </p:nvSpPr>
-        <p:spPr>
-          <a:xfrm>
-            <a:off x="640080" y="1865376"/>
-            <a:ext cx="11155680" cy="384048"/>
-          </a:xfrm>
-          <a:prstGeom prst="rect">
-            <a:avLst/>
-          </a:prstGeom>
-          <a:noFill/>
-        </p:spPr>
-        <p:txBody>
-          <a:bodyPr wrap="square" lIns="0" rIns="0" tIns="0" bIns="0">
-            <a:spAutoFit/>
-          </a:bodyPr>
-          <a:lstStyle/>
-          <a:p>
-            <a:pPr algn="l"/>
-            <a:r>
-              <a:rPr sz="1200" b="0">
-                <a:solidFill>
-                  <a:srgbClr val="3D2200"/>
-                </a:solidFill>
-                <a:latin typeface="Hiragino Sans"/>
-              </a:rPr>
-              <a:t>• **2026/05/01 (金) 9:00〜22:00** 代表・開発・営業でオンコール体制</a:t>
-            </a:r>
-          </a:p>
-        </p:txBody>
-      </p:sp>
-      <p:sp>
-        <p:nvSpPr>
-          <p:cNvPr id="7" name="TextBox 6"/>
-          <p:cNvSpPr txBox="1"/>
-          <p:nvPr/>
-        </p:nvSpPr>
-        <p:spPr>
-          <a:xfrm>
-            <a:off x="640080" y="2249424"/>
-            <a:ext cx="11155680" cy="384048"/>
-          </a:xfrm>
-          <a:prstGeom prst="rect">
-            <a:avLst/>
-          </a:prstGeom>
-          <a:noFill/>
-        </p:spPr>
-        <p:txBody>
-          <a:bodyPr wrap="square" lIns="0" rIns="0" tIns="0" bIns="0">
-            <a:spAutoFit/>
-          </a:bodyPr>
-          <a:lstStyle/>
-          <a:p>
-            <a:pPr algn="l"/>
-            <a:r>
-              <a:rPr sz="1200" b="0">
-                <a:solidFill>
-                  <a:srgbClr val="3D2200"/>
-                </a:solidFill>
-                <a:latin typeface="Hiragino Sans"/>
-              </a:rPr>
-              <a:t>• **2026/05/02〜** 通常運用開始</a:t>
+              <a:t>上限: 一律 3%、上限なし</a:t>
             </a:r>
           </a:p>
         </p:txBody>
@@ -5303,7 +5307,7 @@
                 </a:solidFill>
                 <a:latin typeface="Hiragino Sans"/>
               </a:rPr>
-              <a:t>8. ご連絡先</a:t>
+              <a:t>9. 既存 10 社様への唯一の優遇</a:t>
             </a:r>
           </a:p>
         </p:txBody>
@@ -5338,7 +5342,7 @@
                 </a:solidFill>
                 <a:latin typeface="Hiragino Sans"/>
               </a:rPr>
-              <a:t>株式会社wazeka ぺいほーむ事業部</a:t>
+              <a:t>**AI 診断結果・マッチングでの優先送客**</a:t>
             </a:r>
           </a:p>
         </p:txBody>
@@ -5373,7 +5377,7 @@
                 </a:solidFill>
                 <a:latin typeface="Hiragino Sans"/>
               </a:rPr>
-              <a:t>• Email: `support@payhome.jp`</a:t>
+              <a:t>• /diagnosis の結果画面で既存 10 社を先頭に優先表示</a:t>
             </a:r>
           </a:p>
         </p:txBody>
@@ -5408,7 +5412,7 @@
                 </a:solidFill>
                 <a:latin typeface="Hiragino Sans"/>
               </a:rPr>
-              <a:t>• 電話: 担当営業まで</a:t>
+              <a:t>• /builders 一覧と TOP の工務店PICKUP でも上位表示</a:t>
             </a:r>
           </a:p>
         </p:txBody>
@@ -5443,7 +5447,7 @@
                 </a:solidFill>
                 <a:latin typeface="Hiragino Sans"/>
               </a:rPr>
-              <a:t>• 管理画面ログイン: リリース後に ID/PW を送付</a:t>
+              <a:t>• 料金は完全に同一 (優遇ゼロ)</a:t>
             </a:r>
           </a:p>
         </p:txBody>
@@ -5456,29 +5460,29 @@
         </p:nvSpPr>
         <p:spPr>
           <a:xfrm>
-            <a:off x="457200" y="2752344"/>
-            <a:ext cx="11338560" cy="457200"/>
-          </a:xfrm>
-          <a:prstGeom prst="rect">
-            <a:avLst/>
-          </a:prstGeom>
-          <a:noFill/>
-        </p:spPr>
-        <p:txBody>
-          <a:bodyPr wrap="square" lIns="0" rIns="0" tIns="0" bIns="0">
-            <a:spAutoFit/>
-          </a:bodyPr>
-          <a:lstStyle/>
-          <a:p>
-            <a:pPr algn="l"/>
-            <a:r>
-              <a:rPr sz="1300" b="0">
+            <a:off x="640080" y="2752344"/>
+            <a:ext cx="11155680" cy="384048"/>
+          </a:xfrm>
+          <a:prstGeom prst="rect">
+            <a:avLst/>
+          </a:prstGeom>
+          <a:noFill/>
+        </p:spPr>
+        <p:txBody>
+          <a:bodyPr wrap="square" lIns="0" rIns="0" tIns="0" bIns="0">
+            <a:spAutoFit/>
+          </a:bodyPr>
+          <a:lstStyle/>
+          <a:p>
+            <a:pPr algn="l"/>
+            <a:r>
+              <a:rPr sz="1200" b="0">
                 <a:solidFill>
                   <a:srgbClr val="3D2200"/>
                 </a:solidFill>
                 <a:latin typeface="Hiragino Sans"/>
               </a:rPr>
-              <a:t>**引き続きよろしくお願いいたします。**</a:t>
+              <a:t>• 実質的な「送客率の優遇」となります</a:t>
             </a:r>
           </a:p>
         </p:txBody>
@@ -5510,13 +5514,13 @@
         <p:spPr>
           <a:xfrm>
             <a:off x="0" y="0"/>
-            <a:ext cx="12191695" cy="6858000"/>
+            <a:ext cx="12191695" cy="731520"/>
           </a:xfrm>
           <a:prstGeom prst="rect">
             <a:avLst/>
           </a:prstGeom>
           <a:solidFill>
-            <a:srgbClr val="3D2200"/>
+            <a:srgbClr val="E8740C"/>
           </a:solidFill>
           <a:ln>
             <a:noFill/>
@@ -5552,29 +5556,29 @@
         </p:nvSpPr>
         <p:spPr>
           <a:xfrm>
-            <a:off x="457200" y="2560320"/>
-            <a:ext cx="11247120" cy="1097280"/>
-          </a:xfrm>
-          <a:prstGeom prst="rect">
-            <a:avLst/>
-          </a:prstGeom>
-          <a:noFill/>
-        </p:spPr>
-        <p:txBody>
-          <a:bodyPr wrap="square" lIns="0" rIns="0" tIns="0" bIns="0">
-            <a:spAutoFit/>
-          </a:bodyPr>
-          <a:lstStyle/>
-          <a:p>
-            <a:pPr algn="ctr"/>
-            <a:r>
-              <a:rPr sz="4000" b="1">
+            <a:off x="274320" y="91440"/>
+            <a:ext cx="11887200" cy="548640"/>
+          </a:xfrm>
+          <a:prstGeom prst="rect">
+            <a:avLst/>
+          </a:prstGeom>
+          <a:noFill/>
+        </p:spPr>
+        <p:txBody>
+          <a:bodyPr wrap="square" lIns="0" rIns="0" tIns="0" bIns="0">
+            <a:spAutoFit/>
+          </a:bodyPr>
+          <a:lstStyle/>
+          <a:p>
+            <a:pPr algn="l"/>
+            <a:r>
+              <a:rPr sz="2200" b="1">
                 <a:solidFill>
                   <a:srgbClr val="FFFFFF"/>
                 </a:solidFill>
                 <a:latin typeface="Hiragino Sans"/>
               </a:rPr>
-              <a:t>よろしくお願いいたします。</a:t>
+              <a:t>10. お願いしたいこと  (1/2)</a:t>
             </a:r>
           </a:p>
         </p:txBody>
@@ -5587,29 +5591,274 @@
         </p:nvSpPr>
         <p:spPr>
           <a:xfrm>
-            <a:off x="457200" y="3840480"/>
-            <a:ext cx="11247120" cy="548640"/>
-          </a:xfrm>
-          <a:prstGeom prst="rect">
-            <a:avLst/>
-          </a:prstGeom>
-          <a:noFill/>
-        </p:spPr>
-        <p:txBody>
-          <a:bodyPr wrap="square" lIns="0" rIns="0" tIns="0" bIns="0">
-            <a:spAutoFit/>
-          </a:bodyPr>
-          <a:lstStyle/>
-          <a:p>
-            <a:pPr algn="ctr"/>
-            <a:r>
-              <a:rPr sz="1800" b="0">
-                <a:solidFill>
-                  <a:srgbClr val="FFF8F0"/>
-                </a:solidFill>
-                <a:latin typeface="Hiragino Sans"/>
-              </a:rPr>
-              <a:t>support@payhome.jp</a:t>
+            <a:off x="365760" y="1097280"/>
+            <a:ext cx="11430000" cy="457200"/>
+          </a:xfrm>
+          <a:prstGeom prst="rect">
+            <a:avLst/>
+          </a:prstGeom>
+          <a:noFill/>
+        </p:spPr>
+        <p:txBody>
+          <a:bodyPr wrap="square" lIns="0" rIns="0" tIns="0" bIns="0">
+            <a:spAutoFit/>
+          </a:bodyPr>
+          <a:lstStyle/>
+          <a:p>
+            <a:pPr algn="l"/>
+            <a:r>
+              <a:rPr sz="1800" b="1">
+                <a:solidFill>
+                  <a:srgbClr val="3D2200"/>
+                </a:solidFill>
+                <a:latin typeface="Hiragino Sans"/>
+              </a:rPr>
+              <a:t>5月1日までに</a:t>
+            </a:r>
+          </a:p>
+        </p:txBody>
+      </p:sp>
+      <p:sp>
+        <p:nvSpPr>
+          <p:cNvPr id="5" name="TextBox 4"/>
+          <p:cNvSpPr txBox="1"/>
+          <p:nvPr/>
+        </p:nvSpPr>
+        <p:spPr>
+          <a:xfrm>
+            <a:off x="640080" y="1600200"/>
+            <a:ext cx="11155680" cy="384048"/>
+          </a:xfrm>
+          <a:prstGeom prst="rect">
+            <a:avLst/>
+          </a:prstGeom>
+          <a:noFill/>
+        </p:spPr>
+        <p:txBody>
+          <a:bodyPr wrap="square" lIns="0" rIns="0" tIns="0" bIns="0">
+            <a:spAutoFit/>
+          </a:bodyPr>
+          <a:lstStyle/>
+          <a:p>
+            <a:pPr algn="l"/>
+            <a:r>
+              <a:rPr sz="1200" b="0">
+                <a:solidFill>
+                  <a:srgbClr val="3D2200"/>
+                </a:solidFill>
+                <a:latin typeface="Hiragino Sans"/>
+              </a:rPr>
+              <a:t>• 料金プラン書面の締結</a:t>
+            </a:r>
+          </a:p>
+        </p:txBody>
+      </p:sp>
+      <p:sp>
+        <p:nvSpPr>
+          <p:cNvPr id="6" name="TextBox 5"/>
+          <p:cNvSpPr txBox="1"/>
+          <p:nvPr/>
+        </p:nvSpPr>
+        <p:spPr>
+          <a:xfrm>
+            <a:off x="640080" y="1984248"/>
+            <a:ext cx="11155680" cy="384048"/>
+          </a:xfrm>
+          <a:prstGeom prst="rect">
+            <a:avLst/>
+          </a:prstGeom>
+          <a:noFill/>
+        </p:spPr>
+        <p:txBody>
+          <a:bodyPr wrap="square" lIns="0" rIns="0" tIns="0" bIns="0">
+            <a:spAutoFit/>
+          </a:bodyPr>
+          <a:lstStyle/>
+          <a:p>
+            <a:pPr algn="l"/>
+            <a:r>
+              <a:rPr sz="1200" b="0">
+                <a:solidFill>
+                  <a:srgbClr val="3D2200"/>
+                </a:solidFill>
+                <a:latin typeface="Hiragino Sans"/>
+              </a:rPr>
+              <a:t>• 掲載情報の最終チェック</a:t>
+            </a:r>
+          </a:p>
+        </p:txBody>
+      </p:sp>
+      <p:sp>
+        <p:nvSpPr>
+          <p:cNvPr id="7" name="TextBox 6"/>
+          <p:cNvSpPr txBox="1"/>
+          <p:nvPr/>
+        </p:nvSpPr>
+        <p:spPr>
+          <a:xfrm>
+            <a:off x="640080" y="2368296"/>
+            <a:ext cx="11155680" cy="384048"/>
+          </a:xfrm>
+          <a:prstGeom prst="rect">
+            <a:avLst/>
+          </a:prstGeom>
+          <a:noFill/>
+        </p:spPr>
+        <p:txBody>
+          <a:bodyPr wrap="square" lIns="0" rIns="0" tIns="0" bIns="0">
+            <a:spAutoFit/>
+          </a:bodyPr>
+          <a:lstStyle/>
+          <a:p>
+            <a:pPr algn="l"/>
+            <a:r>
+              <a:rPr sz="1200" b="0">
+                <a:solidFill>
+                  <a:srgbClr val="3D2200"/>
+                </a:solidFill>
+                <a:latin typeface="Hiragino Sans"/>
+              </a:rPr>
+              <a:t>• 見学会情報の登録 (5月以降の予定を 3 件以上)</a:t>
+            </a:r>
+          </a:p>
+        </p:txBody>
+      </p:sp>
+      <p:sp>
+        <p:nvSpPr>
+          <p:cNvPr id="8" name="TextBox 7"/>
+          <p:cNvSpPr txBox="1"/>
+          <p:nvPr/>
+        </p:nvSpPr>
+        <p:spPr>
+          <a:xfrm>
+            <a:off x="365760" y="2752344"/>
+            <a:ext cx="11430000" cy="457200"/>
+          </a:xfrm>
+          <a:prstGeom prst="rect">
+            <a:avLst/>
+          </a:prstGeom>
+          <a:noFill/>
+        </p:spPr>
+        <p:txBody>
+          <a:bodyPr wrap="square" lIns="0" rIns="0" tIns="0" bIns="0">
+            <a:spAutoFit/>
+          </a:bodyPr>
+          <a:lstStyle/>
+          <a:p>
+            <a:pPr algn="l"/>
+            <a:r>
+              <a:rPr sz="1800" b="1">
+                <a:solidFill>
+                  <a:srgbClr val="3D2200"/>
+                </a:solidFill>
+                <a:latin typeface="Hiragino Sans"/>
+              </a:rPr>
+              <a:t>リリース後</a:t>
+            </a:r>
+          </a:p>
+        </p:txBody>
+      </p:sp>
+      <p:sp>
+        <p:nvSpPr>
+          <p:cNvPr id="9" name="TextBox 8"/>
+          <p:cNvSpPr txBox="1"/>
+          <p:nvPr/>
+        </p:nvSpPr>
+        <p:spPr>
+          <a:xfrm>
+            <a:off x="640080" y="3255263"/>
+            <a:ext cx="11155680" cy="384048"/>
+          </a:xfrm>
+          <a:prstGeom prst="rect">
+            <a:avLst/>
+          </a:prstGeom>
+          <a:noFill/>
+        </p:spPr>
+        <p:txBody>
+          <a:bodyPr wrap="square" lIns="0" rIns="0" tIns="0" bIns="0">
+            <a:spAutoFit/>
+          </a:bodyPr>
+          <a:lstStyle/>
+          <a:p>
+            <a:pPr algn="l"/>
+            <a:r>
+              <a:rPr sz="1200" b="0">
+                <a:solidFill>
+                  <a:srgbClr val="3D2200"/>
+                </a:solidFill>
+                <a:latin typeface="Hiragino Sans"/>
+              </a:rPr>
+              <a:t>• 見学会予約が入ったら 24時間以内にユーザーへご連絡</a:t>
+            </a:r>
+          </a:p>
+        </p:txBody>
+      </p:sp>
+      <p:sp>
+        <p:nvSpPr>
+          <p:cNvPr id="10" name="TextBox 9"/>
+          <p:cNvSpPr txBox="1"/>
+          <p:nvPr/>
+        </p:nvSpPr>
+        <p:spPr>
+          <a:xfrm>
+            <a:off x="640080" y="3639311"/>
+            <a:ext cx="11155680" cy="384048"/>
+          </a:xfrm>
+          <a:prstGeom prst="rect">
+            <a:avLst/>
+          </a:prstGeom>
+          <a:noFill/>
+        </p:spPr>
+        <p:txBody>
+          <a:bodyPr wrap="square" lIns="0" rIns="0" tIns="0" bIns="0">
+            <a:spAutoFit/>
+          </a:bodyPr>
+          <a:lstStyle/>
+          <a:p>
+            <a:pPr algn="l"/>
+            <a:r>
+              <a:rPr sz="1200" b="0">
+                <a:solidFill>
+                  <a:srgbClr val="3D2200"/>
+                </a:solidFill>
+                <a:latin typeface="Hiragino Sans"/>
+              </a:rPr>
+              <a:t>• 月次で予約の成約可否をご共有</a:t>
+            </a:r>
+          </a:p>
+        </p:txBody>
+      </p:sp>
+      <p:sp>
+        <p:nvSpPr>
+          <p:cNvPr id="11" name="TextBox 10"/>
+          <p:cNvSpPr txBox="1"/>
+          <p:nvPr/>
+        </p:nvSpPr>
+        <p:spPr>
+          <a:xfrm>
+            <a:off x="640080" y="4023359"/>
+            <a:ext cx="11155680" cy="384048"/>
+          </a:xfrm>
+          <a:prstGeom prst="rect">
+            <a:avLst/>
+          </a:prstGeom>
+          <a:noFill/>
+        </p:spPr>
+        <p:txBody>
+          <a:bodyPr wrap="square" lIns="0" rIns="0" tIns="0" bIns="0">
+            <a:spAutoFit/>
+          </a:bodyPr>
+          <a:lstStyle/>
+          <a:p>
+            <a:pPr algn="l"/>
+            <a:r>
+              <a:rPr sz="1200" b="0">
+                <a:solidFill>
+                  <a:srgbClr val="3D2200"/>
+                </a:solidFill>
+                <a:latin typeface="Hiragino Sans"/>
+              </a:rPr>
+              <a:t>• Phase 2 の撮影プランに興味がある旨の事前ご連絡</a:t>
             </a:r>
           </a:p>
         </p:txBody>
@@ -5705,7 +5954,7 @@
                 </a:solidFill>
                 <a:latin typeface="Hiragino Sans"/>
               </a:rPr>
-              <a:t>1. 5月1日リリース版で公開する機能  (1/4)</a:t>
+              <a:t>1. ぺいほーむは「平屋づくりの意思決定プラットフォーム」</a:t>
             </a:r>
           </a:p>
         </p:txBody>
@@ -5740,7 +5989,7 @@
                 </a:solidFill>
                 <a:latin typeface="Hiragino Sans"/>
               </a:rPr>
-              <a:t>「選択と集中」という方針で、核となる **『YouTube → TOP → 工務店ページ → 見学会予約』** の1本に絞り込んでリリースします。</a:t>
+              <a:t>ぺいほーむは単なる住宅ポータルではありません。動画・AI診断・無料相談・事例ライブラリを通じて、ユーザーが **納得して意思決定できる状態** を作ってから工務店様に送客する **平屋づくりの意思決定プラットフォーム** です。</a:t>
             </a:r>
           </a:p>
         </p:txBody>
@@ -5753,29 +6002,798 @@
         </p:nvSpPr>
         <p:spPr>
           <a:xfrm>
-            <a:off x="365760" y="1600200"/>
-            <a:ext cx="11430000" cy="457200"/>
-          </a:xfrm>
-          <a:prstGeom prst="rect">
-            <a:avLst/>
-          </a:prstGeom>
-          <a:noFill/>
-        </p:spPr>
-        <p:txBody>
-          <a:bodyPr wrap="square" lIns="0" rIns="0" tIns="0" bIns="0">
-            <a:spAutoFit/>
-          </a:bodyPr>
-          <a:lstStyle/>
-          <a:p>
-            <a:pPr algn="l"/>
-            <a:r>
-              <a:rPr sz="1800" b="1">
+            <a:off x="457200" y="1600200"/>
+            <a:ext cx="11338560" cy="457200"/>
+          </a:xfrm>
+          <a:prstGeom prst="rect">
+            <a:avLst/>
+          </a:prstGeom>
+          <a:noFill/>
+        </p:spPr>
+        <p:txBody>
+          <a:bodyPr wrap="square" lIns="0" rIns="0" tIns="0" bIns="0">
+            <a:spAutoFit/>
+          </a:bodyPr>
+          <a:lstStyle/>
+          <a:p>
+            <a:pPr algn="l"/>
+            <a:r>
+              <a:rPr sz="1300" b="0">
                 <a:solidFill>
                   <a:srgbClr val="3D2200"/>
                 </a:solidFill>
                 <a:latin typeface="Hiragino Sans"/>
               </a:rPr>
-              <a:t>公開するページ（17画面）</a:t>
+              <a:t>核のループは以下です:</a:t>
+            </a:r>
+          </a:p>
+        </p:txBody>
+      </p:sp>
+      <p:sp>
+        <p:nvSpPr>
+          <p:cNvPr id="6" name="TextBox 5"/>
+          <p:cNvSpPr txBox="1"/>
+          <p:nvPr/>
+        </p:nvSpPr>
+        <p:spPr>
+          <a:xfrm>
+            <a:off x="457200" y="2103120"/>
+            <a:ext cx="11338560" cy="457200"/>
+          </a:xfrm>
+          <a:prstGeom prst="rect">
+            <a:avLst/>
+          </a:prstGeom>
+          <a:noFill/>
+        </p:spPr>
+        <p:txBody>
+          <a:bodyPr wrap="square" lIns="0" rIns="0" tIns="0" bIns="0">
+            <a:spAutoFit/>
+          </a:bodyPr>
+          <a:lstStyle/>
+          <a:p>
+            <a:pPr algn="l"/>
+            <a:r>
+              <a:rPr sz="1300" b="0">
+                <a:solidFill>
+                  <a:srgbClr val="3D2200"/>
+                </a:solidFill>
+                <a:latin typeface="Hiragino Sans"/>
+              </a:rPr>
+              <a:t>動画 → AI診断 or 無料相談 → 工務店詳細 → 見学会予約</a:t>
+            </a:r>
+          </a:p>
+        </p:txBody>
+      </p:sp>
+    </p:spTree>
+  </p:cSld>
+  <p:clrMapOvr>
+    <a:masterClrMapping/>
+  </p:clrMapOvr>
+</p:sld>
+</file>
+
+<file path=ppt/slides/slide20.xml><?xml version="1.0" encoding="utf-8"?>
+<p:sld xmlns:a="http://schemas.openxmlformats.org/drawingml/2006/main" xmlns:p="http://schemas.openxmlformats.org/presentationml/2006/main" xmlns:r="http://schemas.openxmlformats.org/officeDocument/2006/relationships">
+  <p:cSld>
+    <p:spTree>
+      <p:nvGrpSpPr>
+        <p:cNvPr id="1" name=""/>
+        <p:cNvGrpSpPr/>
+        <p:nvPr/>
+      </p:nvGrpSpPr>
+      <p:grpSpPr/>
+      <p:sp>
+        <p:nvSpPr>
+          <p:cNvPr id="2" name="Rectangle 1"/>
+          <p:cNvSpPr/>
+          <p:nvPr/>
+        </p:nvSpPr>
+        <p:spPr>
+          <a:xfrm>
+            <a:off x="0" y="0"/>
+            <a:ext cx="12191695" cy="731520"/>
+          </a:xfrm>
+          <a:prstGeom prst="rect">
+            <a:avLst/>
+          </a:prstGeom>
+          <a:solidFill>
+            <a:srgbClr val="E8740C"/>
+          </a:solidFill>
+          <a:ln>
+            <a:noFill/>
+          </a:ln>
+        </p:spPr>
+        <p:style>
+          <a:lnRef idx="1">
+            <a:schemeClr val="accent1"/>
+          </a:lnRef>
+          <a:fillRef idx="3">
+            <a:schemeClr val="accent1"/>
+          </a:fillRef>
+          <a:effectRef idx="2">
+            <a:schemeClr val="accent1"/>
+          </a:effectRef>
+          <a:fontRef idx="minor">
+            <a:schemeClr val="lt1"/>
+          </a:fontRef>
+        </p:style>
+        <p:txBody>
+          <a:bodyPr rtlCol="0" anchor="ctr"/>
+          <a:lstStyle/>
+          <a:p>
+            <a:pPr algn="ctr"/>
+          </a:p>
+        </p:txBody>
+      </p:sp>
+      <p:sp>
+        <p:nvSpPr>
+          <p:cNvPr id="3" name="TextBox 2"/>
+          <p:cNvSpPr txBox="1"/>
+          <p:nvPr/>
+        </p:nvSpPr>
+        <p:spPr>
+          <a:xfrm>
+            <a:off x="274320" y="91440"/>
+            <a:ext cx="11887200" cy="548640"/>
+          </a:xfrm>
+          <a:prstGeom prst="rect">
+            <a:avLst/>
+          </a:prstGeom>
+          <a:noFill/>
+        </p:spPr>
+        <p:txBody>
+          <a:bodyPr wrap="square" lIns="0" rIns="0" tIns="0" bIns="0">
+            <a:spAutoFit/>
+          </a:bodyPr>
+          <a:lstStyle/>
+          <a:p>
+            <a:pPr algn="l"/>
+            <a:r>
+              <a:rPr sz="2200" b="1">
+                <a:solidFill>
+                  <a:srgbClr val="FFFFFF"/>
+                </a:solidFill>
+                <a:latin typeface="Hiragino Sans"/>
+              </a:rPr>
+              <a:t>10. お願いしたいこと  (2/2)</a:t>
+            </a:r>
+          </a:p>
+        </p:txBody>
+      </p:sp>
+    </p:spTree>
+  </p:cSld>
+  <p:clrMapOvr>
+    <a:masterClrMapping/>
+  </p:clrMapOvr>
+</p:sld>
+</file>
+
+<file path=ppt/slides/slide21.xml><?xml version="1.0" encoding="utf-8"?>
+<p:sld xmlns:a="http://schemas.openxmlformats.org/drawingml/2006/main" xmlns:p="http://schemas.openxmlformats.org/presentationml/2006/main" xmlns:r="http://schemas.openxmlformats.org/officeDocument/2006/relationships">
+  <p:cSld>
+    <p:spTree>
+      <p:nvGrpSpPr>
+        <p:cNvPr id="1" name=""/>
+        <p:cNvGrpSpPr/>
+        <p:nvPr/>
+      </p:nvGrpSpPr>
+      <p:grpSpPr/>
+      <p:sp>
+        <p:nvSpPr>
+          <p:cNvPr id="2" name="Rectangle 1"/>
+          <p:cNvSpPr/>
+          <p:nvPr/>
+        </p:nvSpPr>
+        <p:spPr>
+          <a:xfrm>
+            <a:off x="0" y="0"/>
+            <a:ext cx="12191695" cy="731520"/>
+          </a:xfrm>
+          <a:prstGeom prst="rect">
+            <a:avLst/>
+          </a:prstGeom>
+          <a:solidFill>
+            <a:srgbClr val="E8740C"/>
+          </a:solidFill>
+          <a:ln>
+            <a:noFill/>
+          </a:ln>
+        </p:spPr>
+        <p:style>
+          <a:lnRef idx="1">
+            <a:schemeClr val="accent1"/>
+          </a:lnRef>
+          <a:fillRef idx="3">
+            <a:schemeClr val="accent1"/>
+          </a:fillRef>
+          <a:effectRef idx="2">
+            <a:schemeClr val="accent1"/>
+          </a:effectRef>
+          <a:fontRef idx="minor">
+            <a:schemeClr val="lt1"/>
+          </a:fontRef>
+        </p:style>
+        <p:txBody>
+          <a:bodyPr rtlCol="0" anchor="ctr"/>
+          <a:lstStyle/>
+          <a:p>
+            <a:pPr algn="ctr"/>
+          </a:p>
+        </p:txBody>
+      </p:sp>
+      <p:sp>
+        <p:nvSpPr>
+          <p:cNvPr id="3" name="TextBox 2"/>
+          <p:cNvSpPr txBox="1"/>
+          <p:nvPr/>
+        </p:nvSpPr>
+        <p:spPr>
+          <a:xfrm>
+            <a:off x="274320" y="91440"/>
+            <a:ext cx="11887200" cy="548640"/>
+          </a:xfrm>
+          <a:prstGeom prst="rect">
+            <a:avLst/>
+          </a:prstGeom>
+          <a:noFill/>
+        </p:spPr>
+        <p:txBody>
+          <a:bodyPr wrap="square" lIns="0" rIns="0" tIns="0" bIns="0">
+            <a:spAutoFit/>
+          </a:bodyPr>
+          <a:lstStyle/>
+          <a:p>
+            <a:pPr algn="l"/>
+            <a:r>
+              <a:rPr sz="2200" b="1">
+                <a:solidFill>
+                  <a:srgbClr val="FFFFFF"/>
+                </a:solidFill>
+                <a:latin typeface="Hiragino Sans"/>
+              </a:rPr>
+              <a:t>11. リリース日と流れ</a:t>
+            </a:r>
+          </a:p>
+        </p:txBody>
+      </p:sp>
+      <p:sp>
+        <p:nvSpPr>
+          <p:cNvPr id="4" name="TextBox 3"/>
+          <p:cNvSpPr txBox="1"/>
+          <p:nvPr/>
+        </p:nvSpPr>
+        <p:spPr>
+          <a:xfrm>
+            <a:off x="640080" y="1097280"/>
+            <a:ext cx="11155680" cy="384048"/>
+          </a:xfrm>
+          <a:prstGeom prst="rect">
+            <a:avLst/>
+          </a:prstGeom>
+          <a:noFill/>
+        </p:spPr>
+        <p:txBody>
+          <a:bodyPr wrap="square" lIns="0" rIns="0" tIns="0" bIns="0">
+            <a:spAutoFit/>
+          </a:bodyPr>
+          <a:lstStyle/>
+          <a:p>
+            <a:pPr algn="l"/>
+            <a:r>
+              <a:rPr sz="1200" b="0">
+                <a:solidFill>
+                  <a:srgbClr val="3D2200"/>
+                </a:solidFill>
+                <a:latin typeface="Hiragino Sans"/>
+              </a:rPr>
+              <a:t>• 2026/05/01 (金) AM 6:00 本番リリース</a:t>
+            </a:r>
+          </a:p>
+        </p:txBody>
+      </p:sp>
+      <p:sp>
+        <p:nvSpPr>
+          <p:cNvPr id="5" name="TextBox 4"/>
+          <p:cNvSpPr txBox="1"/>
+          <p:nvPr/>
+        </p:nvSpPr>
+        <p:spPr>
+          <a:xfrm>
+            <a:off x="640080" y="1481328"/>
+            <a:ext cx="11155680" cy="384048"/>
+          </a:xfrm>
+          <a:prstGeom prst="rect">
+            <a:avLst/>
+          </a:prstGeom>
+          <a:noFill/>
+        </p:spPr>
+        <p:txBody>
+          <a:bodyPr wrap="square" lIns="0" rIns="0" tIns="0" bIns="0">
+            <a:spAutoFit/>
+          </a:bodyPr>
+          <a:lstStyle/>
+          <a:p>
+            <a:pPr algn="l"/>
+            <a:r>
+              <a:rPr sz="1200" b="0">
+                <a:solidFill>
+                  <a:srgbClr val="3D2200"/>
+                </a:solidFill>
+                <a:latin typeface="Hiragino Sans"/>
+              </a:rPr>
+              <a:t>• 2026/05/01 (金) AM 9:00 プレスリリース配信 + YouTube 告知動画公開</a:t>
+            </a:r>
+          </a:p>
+        </p:txBody>
+      </p:sp>
+      <p:sp>
+        <p:nvSpPr>
+          <p:cNvPr id="6" name="TextBox 5"/>
+          <p:cNvSpPr txBox="1"/>
+          <p:nvPr/>
+        </p:nvSpPr>
+        <p:spPr>
+          <a:xfrm>
+            <a:off x="640080" y="1865376"/>
+            <a:ext cx="11155680" cy="384048"/>
+          </a:xfrm>
+          <a:prstGeom prst="rect">
+            <a:avLst/>
+          </a:prstGeom>
+          <a:noFill/>
+        </p:spPr>
+        <p:txBody>
+          <a:bodyPr wrap="square" lIns="0" rIns="0" tIns="0" bIns="0">
+            <a:spAutoFit/>
+          </a:bodyPr>
+          <a:lstStyle/>
+          <a:p>
+            <a:pPr algn="l"/>
+            <a:r>
+              <a:rPr sz="1200" b="0">
+                <a:solidFill>
+                  <a:srgbClr val="3D2200"/>
+                </a:solidFill>
+                <a:latin typeface="Hiragino Sans"/>
+              </a:rPr>
+              <a:t>• 2026/05/01 (金) 9:00〜22:00 代表・開発・営業でオンコール体制</a:t>
+            </a:r>
+          </a:p>
+        </p:txBody>
+      </p:sp>
+      <p:sp>
+        <p:nvSpPr>
+          <p:cNvPr id="7" name="TextBox 6"/>
+          <p:cNvSpPr txBox="1"/>
+          <p:nvPr/>
+        </p:nvSpPr>
+        <p:spPr>
+          <a:xfrm>
+            <a:off x="640080" y="2249424"/>
+            <a:ext cx="11155680" cy="384048"/>
+          </a:xfrm>
+          <a:prstGeom prst="rect">
+            <a:avLst/>
+          </a:prstGeom>
+          <a:noFill/>
+        </p:spPr>
+        <p:txBody>
+          <a:bodyPr wrap="square" lIns="0" rIns="0" tIns="0" bIns="0">
+            <a:spAutoFit/>
+          </a:bodyPr>
+          <a:lstStyle/>
+          <a:p>
+            <a:pPr algn="l"/>
+            <a:r>
+              <a:rPr sz="1200" b="0">
+                <a:solidFill>
+                  <a:srgbClr val="3D2200"/>
+                </a:solidFill>
+                <a:latin typeface="Hiragino Sans"/>
+              </a:rPr>
+              <a:t>• 2026/05/02〜 通常運用開始</a:t>
+            </a:r>
+          </a:p>
+        </p:txBody>
+      </p:sp>
+    </p:spTree>
+  </p:cSld>
+  <p:clrMapOvr>
+    <a:masterClrMapping/>
+  </p:clrMapOvr>
+</p:sld>
+</file>
+
+<file path=ppt/slides/slide22.xml><?xml version="1.0" encoding="utf-8"?>
+<p:sld xmlns:a="http://schemas.openxmlformats.org/drawingml/2006/main" xmlns:p="http://schemas.openxmlformats.org/presentationml/2006/main" xmlns:r="http://schemas.openxmlformats.org/officeDocument/2006/relationships">
+  <p:cSld>
+    <p:spTree>
+      <p:nvGrpSpPr>
+        <p:cNvPr id="1" name=""/>
+        <p:cNvGrpSpPr/>
+        <p:nvPr/>
+      </p:nvGrpSpPr>
+      <p:grpSpPr/>
+      <p:sp>
+        <p:nvSpPr>
+          <p:cNvPr id="2" name="Rectangle 1"/>
+          <p:cNvSpPr/>
+          <p:nvPr/>
+        </p:nvSpPr>
+        <p:spPr>
+          <a:xfrm>
+            <a:off x="0" y="0"/>
+            <a:ext cx="12191695" cy="731520"/>
+          </a:xfrm>
+          <a:prstGeom prst="rect">
+            <a:avLst/>
+          </a:prstGeom>
+          <a:solidFill>
+            <a:srgbClr val="E8740C"/>
+          </a:solidFill>
+          <a:ln>
+            <a:noFill/>
+          </a:ln>
+        </p:spPr>
+        <p:style>
+          <a:lnRef idx="1">
+            <a:schemeClr val="accent1"/>
+          </a:lnRef>
+          <a:fillRef idx="3">
+            <a:schemeClr val="accent1"/>
+          </a:fillRef>
+          <a:effectRef idx="2">
+            <a:schemeClr val="accent1"/>
+          </a:effectRef>
+          <a:fontRef idx="minor">
+            <a:schemeClr val="lt1"/>
+          </a:fontRef>
+        </p:style>
+        <p:txBody>
+          <a:bodyPr rtlCol="0" anchor="ctr"/>
+          <a:lstStyle/>
+          <a:p>
+            <a:pPr algn="ctr"/>
+          </a:p>
+        </p:txBody>
+      </p:sp>
+      <p:sp>
+        <p:nvSpPr>
+          <p:cNvPr id="3" name="TextBox 2"/>
+          <p:cNvSpPr txBox="1"/>
+          <p:nvPr/>
+        </p:nvSpPr>
+        <p:spPr>
+          <a:xfrm>
+            <a:off x="274320" y="91440"/>
+            <a:ext cx="11887200" cy="548640"/>
+          </a:xfrm>
+          <a:prstGeom prst="rect">
+            <a:avLst/>
+          </a:prstGeom>
+          <a:noFill/>
+        </p:spPr>
+        <p:txBody>
+          <a:bodyPr wrap="square" lIns="0" rIns="0" tIns="0" bIns="0">
+            <a:spAutoFit/>
+          </a:bodyPr>
+          <a:lstStyle/>
+          <a:p>
+            <a:pPr algn="l"/>
+            <a:r>
+              <a:rPr sz="2200" b="1">
+                <a:solidFill>
+                  <a:srgbClr val="FFFFFF"/>
+                </a:solidFill>
+                <a:latin typeface="Hiragino Sans"/>
+              </a:rPr>
+              <a:t>12. ご連絡先</a:t>
+            </a:r>
+          </a:p>
+        </p:txBody>
+      </p:sp>
+      <p:sp>
+        <p:nvSpPr>
+          <p:cNvPr id="4" name="TextBox 3"/>
+          <p:cNvSpPr txBox="1"/>
+          <p:nvPr/>
+        </p:nvSpPr>
+        <p:spPr>
+          <a:xfrm>
+            <a:off x="457200" y="1097280"/>
+            <a:ext cx="11338560" cy="457200"/>
+          </a:xfrm>
+          <a:prstGeom prst="rect">
+            <a:avLst/>
+          </a:prstGeom>
+          <a:noFill/>
+        </p:spPr>
+        <p:txBody>
+          <a:bodyPr wrap="square" lIns="0" rIns="0" tIns="0" bIns="0">
+            <a:spAutoFit/>
+          </a:bodyPr>
+          <a:lstStyle/>
+          <a:p>
+            <a:pPr algn="l"/>
+            <a:r>
+              <a:rPr sz="1300" b="0">
+                <a:solidFill>
+                  <a:srgbClr val="3D2200"/>
+                </a:solidFill>
+                <a:latin typeface="Hiragino Sans"/>
+              </a:rPr>
+              <a:t>株式会社wazeka ぺいほーむ事業部</a:t>
+            </a:r>
+          </a:p>
+        </p:txBody>
+      </p:sp>
+      <p:sp>
+        <p:nvSpPr>
+          <p:cNvPr id="5" name="TextBox 4"/>
+          <p:cNvSpPr txBox="1"/>
+          <p:nvPr/>
+        </p:nvSpPr>
+        <p:spPr>
+          <a:xfrm>
+            <a:off x="640080" y="1600200"/>
+            <a:ext cx="11155680" cy="384048"/>
+          </a:xfrm>
+          <a:prstGeom prst="rect">
+            <a:avLst/>
+          </a:prstGeom>
+          <a:noFill/>
+        </p:spPr>
+        <p:txBody>
+          <a:bodyPr wrap="square" lIns="0" rIns="0" tIns="0" bIns="0">
+            <a:spAutoFit/>
+          </a:bodyPr>
+          <a:lstStyle/>
+          <a:p>
+            <a:pPr algn="l"/>
+            <a:r>
+              <a:rPr sz="1200" b="0">
+                <a:solidFill>
+                  <a:srgbClr val="3D2200"/>
+                </a:solidFill>
+                <a:latin typeface="Hiragino Sans"/>
+              </a:rPr>
+              <a:t>• Email: support@payhome.jp</a:t>
+            </a:r>
+          </a:p>
+        </p:txBody>
+      </p:sp>
+      <p:sp>
+        <p:nvSpPr>
+          <p:cNvPr id="6" name="TextBox 5"/>
+          <p:cNvSpPr txBox="1"/>
+          <p:nvPr/>
+        </p:nvSpPr>
+        <p:spPr>
+          <a:xfrm>
+            <a:off x="640080" y="1984248"/>
+            <a:ext cx="11155680" cy="384048"/>
+          </a:xfrm>
+          <a:prstGeom prst="rect">
+            <a:avLst/>
+          </a:prstGeom>
+          <a:noFill/>
+        </p:spPr>
+        <p:txBody>
+          <a:bodyPr wrap="square" lIns="0" rIns="0" tIns="0" bIns="0">
+            <a:spAutoFit/>
+          </a:bodyPr>
+          <a:lstStyle/>
+          <a:p>
+            <a:pPr algn="l"/>
+            <a:r>
+              <a:rPr sz="1200" b="0">
+                <a:solidFill>
+                  <a:srgbClr val="3D2200"/>
+                </a:solidFill>
+                <a:latin typeface="Hiragino Sans"/>
+              </a:rPr>
+              <a:t>• 電話: 担当営業まで</a:t>
+            </a:r>
+          </a:p>
+        </p:txBody>
+      </p:sp>
+      <p:sp>
+        <p:nvSpPr>
+          <p:cNvPr id="7" name="TextBox 6"/>
+          <p:cNvSpPr txBox="1"/>
+          <p:nvPr/>
+        </p:nvSpPr>
+        <p:spPr>
+          <a:xfrm>
+            <a:off x="640080" y="2368296"/>
+            <a:ext cx="11155680" cy="384048"/>
+          </a:xfrm>
+          <a:prstGeom prst="rect">
+            <a:avLst/>
+          </a:prstGeom>
+          <a:noFill/>
+        </p:spPr>
+        <p:txBody>
+          <a:bodyPr wrap="square" lIns="0" rIns="0" tIns="0" bIns="0">
+            <a:spAutoFit/>
+          </a:bodyPr>
+          <a:lstStyle/>
+          <a:p>
+            <a:pPr algn="l"/>
+            <a:r>
+              <a:rPr sz="1200" b="0">
+                <a:solidFill>
+                  <a:srgbClr val="3D2200"/>
+                </a:solidFill>
+                <a:latin typeface="Hiragino Sans"/>
+              </a:rPr>
+              <a:t>• 管理画面ログイン: リリース後に ID/PW を送付</a:t>
+            </a:r>
+          </a:p>
+        </p:txBody>
+      </p:sp>
+      <p:sp>
+        <p:nvSpPr>
+          <p:cNvPr id="8" name="TextBox 7"/>
+          <p:cNvSpPr txBox="1"/>
+          <p:nvPr/>
+        </p:nvSpPr>
+        <p:spPr>
+          <a:xfrm>
+            <a:off x="457200" y="2752344"/>
+            <a:ext cx="11338560" cy="457200"/>
+          </a:xfrm>
+          <a:prstGeom prst="rect">
+            <a:avLst/>
+          </a:prstGeom>
+          <a:noFill/>
+        </p:spPr>
+        <p:txBody>
+          <a:bodyPr wrap="square" lIns="0" rIns="0" tIns="0" bIns="0">
+            <a:spAutoFit/>
+          </a:bodyPr>
+          <a:lstStyle/>
+          <a:p>
+            <a:pPr algn="l"/>
+            <a:r>
+              <a:rPr sz="1300" b="0">
+                <a:solidFill>
+                  <a:srgbClr val="3D2200"/>
+                </a:solidFill>
+                <a:latin typeface="Hiragino Sans"/>
+              </a:rPr>
+              <a:t>引き続きよろしくお願いいたします。</a:t>
+            </a:r>
+          </a:p>
+        </p:txBody>
+      </p:sp>
+    </p:spTree>
+  </p:cSld>
+  <p:clrMapOvr>
+    <a:masterClrMapping/>
+  </p:clrMapOvr>
+</p:sld>
+</file>
+
+<file path=ppt/slides/slide23.xml><?xml version="1.0" encoding="utf-8"?>
+<p:sld xmlns:a="http://schemas.openxmlformats.org/drawingml/2006/main" xmlns:p="http://schemas.openxmlformats.org/presentationml/2006/main" xmlns:r="http://schemas.openxmlformats.org/officeDocument/2006/relationships">
+  <p:cSld>
+    <p:spTree>
+      <p:nvGrpSpPr>
+        <p:cNvPr id="1" name=""/>
+        <p:cNvGrpSpPr/>
+        <p:nvPr/>
+      </p:nvGrpSpPr>
+      <p:grpSpPr/>
+      <p:sp>
+        <p:nvSpPr>
+          <p:cNvPr id="2" name="Rectangle 1"/>
+          <p:cNvSpPr/>
+          <p:nvPr/>
+        </p:nvSpPr>
+        <p:spPr>
+          <a:xfrm>
+            <a:off x="0" y="0"/>
+            <a:ext cx="12191695" cy="6858000"/>
+          </a:xfrm>
+          <a:prstGeom prst="rect">
+            <a:avLst/>
+          </a:prstGeom>
+          <a:solidFill>
+            <a:srgbClr val="3D2200"/>
+          </a:solidFill>
+          <a:ln>
+            <a:noFill/>
+          </a:ln>
+        </p:spPr>
+        <p:style>
+          <a:lnRef idx="1">
+            <a:schemeClr val="accent1"/>
+          </a:lnRef>
+          <a:fillRef idx="3">
+            <a:schemeClr val="accent1"/>
+          </a:fillRef>
+          <a:effectRef idx="2">
+            <a:schemeClr val="accent1"/>
+          </a:effectRef>
+          <a:fontRef idx="minor">
+            <a:schemeClr val="lt1"/>
+          </a:fontRef>
+        </p:style>
+        <p:txBody>
+          <a:bodyPr rtlCol="0" anchor="ctr"/>
+          <a:lstStyle/>
+          <a:p>
+            <a:pPr algn="ctr"/>
+          </a:p>
+        </p:txBody>
+      </p:sp>
+      <p:sp>
+        <p:nvSpPr>
+          <p:cNvPr id="3" name="TextBox 2"/>
+          <p:cNvSpPr txBox="1"/>
+          <p:nvPr/>
+        </p:nvSpPr>
+        <p:spPr>
+          <a:xfrm>
+            <a:off x="457200" y="2560320"/>
+            <a:ext cx="11247120" cy="1097280"/>
+          </a:xfrm>
+          <a:prstGeom prst="rect">
+            <a:avLst/>
+          </a:prstGeom>
+          <a:noFill/>
+        </p:spPr>
+        <p:txBody>
+          <a:bodyPr wrap="square" lIns="0" rIns="0" tIns="0" bIns="0">
+            <a:spAutoFit/>
+          </a:bodyPr>
+          <a:lstStyle/>
+          <a:p>
+            <a:pPr algn="ctr"/>
+            <a:r>
+              <a:rPr sz="4000" b="1">
+                <a:solidFill>
+                  <a:srgbClr val="FFFFFF"/>
+                </a:solidFill>
+                <a:latin typeface="Hiragino Sans"/>
+              </a:rPr>
+              <a:t>よろしくお願いいたします。</a:t>
+            </a:r>
+          </a:p>
+        </p:txBody>
+      </p:sp>
+      <p:sp>
+        <p:nvSpPr>
+          <p:cNvPr id="4" name="TextBox 3"/>
+          <p:cNvSpPr txBox="1"/>
+          <p:nvPr/>
+        </p:nvSpPr>
+        <p:spPr>
+          <a:xfrm>
+            <a:off x="457200" y="3840480"/>
+            <a:ext cx="11247120" cy="548640"/>
+          </a:xfrm>
+          <a:prstGeom prst="rect">
+            <a:avLst/>
+          </a:prstGeom>
+          <a:noFill/>
+        </p:spPr>
+        <p:txBody>
+          <a:bodyPr wrap="square" lIns="0" rIns="0" tIns="0" bIns="0">
+            <a:spAutoFit/>
+          </a:bodyPr>
+          <a:lstStyle/>
+          <a:p>
+            <a:pPr algn="ctr"/>
+            <a:r>
+              <a:rPr sz="1800" b="0">
+                <a:solidFill>
+                  <a:srgbClr val="FFF8F0"/>
+                </a:solidFill>
+                <a:latin typeface="Hiragino Sans"/>
+              </a:rPr>
+              <a:t>support@payhome.jp</a:t>
             </a:r>
           </a:p>
         </p:txBody>
@@ -5871,7 +6889,7 @@
                 </a:solidFill>
                 <a:latin typeface="Hiragino Sans"/>
               </a:rPr>
-              <a:t>1. 5月1日リリース版で公開する機能  (2/4)</a:t>
+              <a:t>2. 5月1日リリース版で公開する機能  (1/2)</a:t>
             </a:r>
           </a:p>
         </p:txBody>
@@ -5884,29 +6902,29 @@
         </p:nvSpPr>
         <p:spPr>
           <a:xfrm>
-            <a:off x="640080" y="1097280"/>
-            <a:ext cx="11155680" cy="384048"/>
-          </a:xfrm>
-          <a:prstGeom prst="rect">
-            <a:avLst/>
-          </a:prstGeom>
-          <a:noFill/>
-        </p:spPr>
-        <p:txBody>
-          <a:bodyPr wrap="square" lIns="0" rIns="0" tIns="0" bIns="0">
-            <a:spAutoFit/>
-          </a:bodyPr>
-          <a:lstStyle/>
-          <a:p>
-            <a:pPr algn="l"/>
-            <a:r>
-              <a:rPr sz="1200" b="0">
+            <a:off x="365760" y="1097280"/>
+            <a:ext cx="11430000" cy="457200"/>
+          </a:xfrm>
+          <a:prstGeom prst="rect">
+            <a:avLst/>
+          </a:prstGeom>
+          <a:noFill/>
+        </p:spPr>
+        <p:txBody>
+          <a:bodyPr wrap="square" lIns="0" rIns="0" tIns="0" bIns="0">
+            <a:spAutoFit/>
+          </a:bodyPr>
+          <a:lstStyle/>
+          <a:p>
+            <a:pPr algn="l"/>
+            <a:r>
+              <a:rPr sz="1800" b="1">
                 <a:solidFill>
                   <a:srgbClr val="3D2200"/>
                 </a:solidFill>
                 <a:latin typeface="Hiragino Sans"/>
               </a:rPr>
-              <a:t>• **TOP ページ** — ヒーロー、AI診断への導線、人気動画PICKUP、工務店PICKUP</a:t>
+              <a:t>リリース時の主導線 (核ループ)</a:t>
             </a:r>
           </a:p>
         </p:txBody>
@@ -5919,29 +6937,29 @@
         </p:nvSpPr>
         <p:spPr>
           <a:xfrm>
-            <a:off x="640080" y="1481328"/>
-            <a:ext cx="11155680" cy="384048"/>
-          </a:xfrm>
-          <a:prstGeom prst="rect">
-            <a:avLst/>
-          </a:prstGeom>
-          <a:noFill/>
-        </p:spPr>
-        <p:txBody>
-          <a:bodyPr wrap="square" lIns="0" rIns="0" tIns="0" bIns="0">
-            <a:spAutoFit/>
-          </a:bodyPr>
-          <a:lstStyle/>
-          <a:p>
-            <a:pPr algn="l"/>
-            <a:r>
-              <a:rPr sz="1200" b="0">
+            <a:off x="457200" y="1600200"/>
+            <a:ext cx="11338560" cy="457200"/>
+          </a:xfrm>
+          <a:prstGeom prst="rect">
+            <a:avLst/>
+          </a:prstGeom>
+          <a:noFill/>
+        </p:spPr>
+        <p:txBody>
+          <a:bodyPr wrap="square" lIns="0" rIns="0" tIns="0" bIns="0">
+            <a:spAutoFit/>
+          </a:bodyPr>
+          <a:lstStyle/>
+          <a:p>
+            <a:pPr algn="l"/>
+            <a:r>
+              <a:rPr sz="1300" b="0">
                 <a:solidFill>
                   <a:srgbClr val="3D2200"/>
                 </a:solidFill>
                 <a:latin typeface="Hiragino Sans"/>
               </a:rPr>
-              <a:t>• **工務店一覧・詳細ページ** — 御社の掲載ページ（メイン導線）</a:t>
+              <a:t>TOP、AI家づくり診断、動画コンテンツ、工務店一覧・詳細、平屋事例ライブラリ、見学会・イベント、無料住宅相談</a:t>
             </a:r>
           </a:p>
         </p:txBody>
@@ -5954,29 +6972,29 @@
         </p:nvSpPr>
         <p:spPr>
           <a:xfrm>
-            <a:off x="640080" y="1865376"/>
-            <a:ext cx="11155680" cy="384048"/>
-          </a:xfrm>
-          <a:prstGeom prst="rect">
-            <a:avLst/>
-          </a:prstGeom>
-          <a:noFill/>
-        </p:spPr>
-        <p:txBody>
-          <a:bodyPr wrap="square" lIns="0" rIns="0" tIns="0" bIns="0">
-            <a:spAutoFit/>
-          </a:bodyPr>
-          <a:lstStyle/>
-          <a:p>
-            <a:pPr algn="l"/>
-            <a:r>
-              <a:rPr sz="1200" b="0">
+            <a:off x="365760" y="2103120"/>
+            <a:ext cx="11430000" cy="457200"/>
+          </a:xfrm>
+          <a:prstGeom prst="rect">
+            <a:avLst/>
+          </a:prstGeom>
+          <a:noFill/>
+        </p:spPr>
+        <p:txBody>
+          <a:bodyPr wrap="square" lIns="0" rIns="0" tIns="0" bIns="0">
+            <a:spAutoFit/>
+          </a:bodyPr>
+          <a:lstStyle/>
+          <a:p>
+            <a:pPr algn="l"/>
+            <a:r>
+              <a:rPr sz="1800" b="1">
                 <a:solidFill>
                   <a:srgbClr val="3D2200"/>
                 </a:solidFill>
                 <a:latin typeface="Hiragino Sans"/>
               </a:rPr>
-              <a:t>• **動画コンテンツ** — YouTube ルームツアー42本を検索・閲覧</a:t>
+              <a:t>補助導線 (公開するがグローバルナビ主役から外す)</a:t>
             </a:r>
           </a:p>
         </p:txBody>
@@ -5989,29 +7007,29 @@
         </p:nvSpPr>
         <p:spPr>
           <a:xfrm>
-            <a:off x="640080" y="2249424"/>
-            <a:ext cx="11155680" cy="384048"/>
-          </a:xfrm>
-          <a:prstGeom prst="rect">
-            <a:avLst/>
-          </a:prstGeom>
-          <a:noFill/>
-        </p:spPr>
-        <p:txBody>
-          <a:bodyPr wrap="square" lIns="0" rIns="0" tIns="0" bIns="0">
-            <a:spAutoFit/>
-          </a:bodyPr>
-          <a:lstStyle/>
-          <a:p>
-            <a:pPr algn="l"/>
-            <a:r>
-              <a:rPr sz="1200" b="0">
+            <a:off x="457200" y="2606039"/>
+            <a:ext cx="11338560" cy="457200"/>
+          </a:xfrm>
+          <a:prstGeom prst="rect">
+            <a:avLst/>
+          </a:prstGeom>
+          <a:noFill/>
+        </p:spPr>
+        <p:txBody>
+          <a:bodyPr wrap="square" lIns="0" rIns="0" tIns="0" bIns="0">
+            <a:spAutoFit/>
+          </a:bodyPr>
+          <a:lstStyle/>
+          <a:p>
+            <a:pPr algn="l"/>
+            <a:r>
+              <a:rPr sz="1300" b="0">
                 <a:solidFill>
                   <a:srgbClr val="3D2200"/>
                 </a:solidFill>
                 <a:latin typeface="Hiragino Sans"/>
               </a:rPr>
-              <a:t>• **見学会・イベント** — 見学会予約フォーム（メイン収益源）</a:t>
+              <a:t>特集一覧、分譲住宅、土地情報 は公開しますが、「さがす」メニューには入れず、フッター経由で到達できる位置付けです。リリース時点ではユーザーに核ループへ集中してもらうためです。</a:t>
             </a:r>
           </a:p>
         </p:txBody>
@@ -6024,274 +7042,29 @@
         </p:nvSpPr>
         <p:spPr>
           <a:xfrm>
-            <a:off x="640080" y="2633472"/>
-            <a:ext cx="11155680" cy="384048"/>
-          </a:xfrm>
-          <a:prstGeom prst="rect">
-            <a:avLst/>
-          </a:prstGeom>
-          <a:noFill/>
-        </p:spPr>
-        <p:txBody>
-          <a:bodyPr wrap="square" lIns="0" rIns="0" tIns="0" bIns="0">
-            <a:spAutoFit/>
-          </a:bodyPr>
-          <a:lstStyle/>
-          <a:p>
-            <a:pPr algn="l"/>
-            <a:r>
-              <a:rPr sz="1200" b="0">
+            <a:off x="365760" y="3108959"/>
+            <a:ext cx="11430000" cy="457200"/>
+          </a:xfrm>
+          <a:prstGeom prst="rect">
+            <a:avLst/>
+          </a:prstGeom>
+          <a:noFill/>
+        </p:spPr>
+        <p:txBody>
+          <a:bodyPr wrap="square" lIns="0" rIns="0" tIns="0" bIns="0">
+            <a:spAutoFit/>
+          </a:bodyPr>
+          <a:lstStyle/>
+          <a:p>
+            <a:pPr algn="l"/>
+            <a:r>
+              <a:rPr sz="1800" b="1">
                 <a:solidFill>
                   <a:srgbClr val="3D2200"/>
                 </a:solidFill>
                 <a:latin typeface="Hiragino Sans"/>
               </a:rPr>
-              <a:t>• **AI家づくり診断** — 10問でユーザーと工務店を自動マッチング</a:t>
-            </a:r>
-          </a:p>
-        </p:txBody>
-      </p:sp>
-      <p:sp>
-        <p:nvSpPr>
-          <p:cNvPr id="9" name="TextBox 8"/>
-          <p:cNvSpPr txBox="1"/>
-          <p:nvPr/>
-        </p:nvSpPr>
-        <p:spPr>
-          <a:xfrm>
-            <a:off x="640080" y="3017520"/>
-            <a:ext cx="11155680" cy="384048"/>
-          </a:xfrm>
-          <a:prstGeom prst="rect">
-            <a:avLst/>
-          </a:prstGeom>
-          <a:noFill/>
-        </p:spPr>
-        <p:txBody>
-          <a:bodyPr wrap="square" lIns="0" rIns="0" tIns="0" bIns="0">
-            <a:spAutoFit/>
-          </a:bodyPr>
-          <a:lstStyle/>
-          <a:p>
-            <a:pPr algn="l"/>
-            <a:r>
-              <a:rPr sz="1200" b="0">
-                <a:solidFill>
-                  <a:srgbClr val="3D2200"/>
-                </a:solidFill>
-                <a:latin typeface="Hiragino Sans"/>
-              </a:rPr>
-              <a:t>• **無料住宅相談** — 専門スタッフが相談を受けるフォーム</a:t>
-            </a:r>
-          </a:p>
-        </p:txBody>
-      </p:sp>
-      <p:sp>
-        <p:nvSpPr>
-          <p:cNvPr id="10" name="TextBox 9"/>
-          <p:cNvSpPr txBox="1"/>
-          <p:nvPr/>
-        </p:nvSpPr>
-        <p:spPr>
-          <a:xfrm>
-            <a:off x="640080" y="3401568"/>
-            <a:ext cx="11155680" cy="384048"/>
-          </a:xfrm>
-          <a:prstGeom prst="rect">
-            <a:avLst/>
-          </a:prstGeom>
-          <a:noFill/>
-        </p:spPr>
-        <p:txBody>
-          <a:bodyPr wrap="square" lIns="0" rIns="0" tIns="0" bIns="0">
-            <a:spAutoFit/>
-          </a:bodyPr>
-          <a:lstStyle/>
-          <a:p>
-            <a:pPr algn="l"/>
-            <a:r>
-              <a:rPr sz="1200" b="0">
-                <a:solidFill>
-                  <a:srgbClr val="3D2200"/>
-                </a:solidFill>
-                <a:latin typeface="Hiragino Sans"/>
-              </a:rPr>
-              <a:t>• **平屋事例ライブラリ** — 施工事例閲覧</a:t>
-            </a:r>
-          </a:p>
-        </p:txBody>
-      </p:sp>
-      <p:sp>
-        <p:nvSpPr>
-          <p:cNvPr id="11" name="TextBox 10"/>
-          <p:cNvSpPr txBox="1"/>
-          <p:nvPr/>
-        </p:nvSpPr>
-        <p:spPr>
-          <a:xfrm>
-            <a:off x="640080" y="3785615"/>
-            <a:ext cx="11155680" cy="384048"/>
-          </a:xfrm>
-          <a:prstGeom prst="rect">
-            <a:avLst/>
-          </a:prstGeom>
-          <a:noFill/>
-        </p:spPr>
-        <p:txBody>
-          <a:bodyPr wrap="square" lIns="0" rIns="0" tIns="0" bIns="0">
-            <a:spAutoFit/>
-          </a:bodyPr>
-          <a:lstStyle/>
-          <a:p>
-            <a:pPr algn="l"/>
-            <a:r>
-              <a:rPr sz="1200" b="0">
-                <a:solidFill>
-                  <a:srgbClr val="3D2200"/>
-                </a:solidFill>
-                <a:latin typeface="Hiragino Sans"/>
-              </a:rPr>
-              <a:t>• **お客様の声** — レビュー閲覧</a:t>
-            </a:r>
-          </a:p>
-        </p:txBody>
-      </p:sp>
-      <p:sp>
-        <p:nvSpPr>
-          <p:cNvPr id="12" name="TextBox 11"/>
-          <p:cNvSpPr txBox="1"/>
-          <p:nvPr/>
-        </p:nvSpPr>
-        <p:spPr>
-          <a:xfrm>
-            <a:off x="640080" y="4169663"/>
-            <a:ext cx="11155680" cy="384048"/>
-          </a:xfrm>
-          <a:prstGeom prst="rect">
-            <a:avLst/>
-          </a:prstGeom>
-          <a:noFill/>
-        </p:spPr>
-        <p:txBody>
-          <a:bodyPr wrap="square" lIns="0" rIns="0" tIns="0" bIns="0">
-            <a:spAutoFit/>
-          </a:bodyPr>
-          <a:lstStyle/>
-          <a:p>
-            <a:pPr algn="l"/>
-            <a:r>
-              <a:rPr sz="1200" b="0">
-                <a:solidFill>
-                  <a:srgbClr val="3D2200"/>
-                </a:solidFill>
-                <a:latin typeface="Hiragino Sans"/>
-              </a:rPr>
-              <a:t>• **デジタルカタログ** — 施工事例集30邸＋平屋間取り図集30プラン</a:t>
-            </a:r>
-          </a:p>
-        </p:txBody>
-      </p:sp>
-      <p:sp>
-        <p:nvSpPr>
-          <p:cNvPr id="13" name="TextBox 12"/>
-          <p:cNvSpPr txBox="1"/>
-          <p:nvPr/>
-        </p:nvSpPr>
-        <p:spPr>
-          <a:xfrm>
-            <a:off x="640080" y="4553712"/>
-            <a:ext cx="11155680" cy="384048"/>
-          </a:xfrm>
-          <a:prstGeom prst="rect">
-            <a:avLst/>
-          </a:prstGeom>
-          <a:noFill/>
-        </p:spPr>
-        <p:txBody>
-          <a:bodyPr wrap="square" lIns="0" rIns="0" tIns="0" bIns="0">
-            <a:spAutoFit/>
-          </a:bodyPr>
-          <a:lstStyle/>
-          <a:p>
-            <a:pPr algn="l"/>
-            <a:r>
-              <a:rPr sz="1200" b="0">
-                <a:solidFill>
-                  <a:srgbClr val="3D2200"/>
-                </a:solidFill>
-                <a:latin typeface="Hiragino Sans"/>
-              </a:rPr>
-              <a:t>• **ぺいほーむとは / 運営会社 / プライバシー / 利用規約**</a:t>
-            </a:r>
-          </a:p>
-        </p:txBody>
-      </p:sp>
-      <p:sp>
-        <p:nvSpPr>
-          <p:cNvPr id="14" name="TextBox 13"/>
-          <p:cNvSpPr txBox="1"/>
-          <p:nvPr/>
-        </p:nvSpPr>
-        <p:spPr>
-          <a:xfrm>
-            <a:off x="640080" y="4937759"/>
-            <a:ext cx="11155680" cy="384048"/>
-          </a:xfrm>
-          <a:prstGeom prst="rect">
-            <a:avLst/>
-          </a:prstGeom>
-          <a:noFill/>
-        </p:spPr>
-        <p:txBody>
-          <a:bodyPr wrap="square" lIns="0" rIns="0" tIns="0" bIns="0">
-            <a:spAutoFit/>
-          </a:bodyPr>
-          <a:lstStyle/>
-          <a:p>
-            <a:pPr algn="l"/>
-            <a:r>
-              <a:rPr sz="1200" b="0">
-                <a:solidFill>
-                  <a:srgbClr val="3D2200"/>
-                </a:solidFill>
-                <a:latin typeface="Hiragino Sans"/>
-              </a:rPr>
-              <a:t>• **会員登録 / ログイン** — メール・Google 認証</a:t>
-            </a:r>
-          </a:p>
-        </p:txBody>
-      </p:sp>
-      <p:sp>
-        <p:nvSpPr>
-          <p:cNvPr id="15" name="TextBox 14"/>
-          <p:cNvSpPr txBox="1"/>
-          <p:nvPr/>
-        </p:nvSpPr>
-        <p:spPr>
-          <a:xfrm>
-            <a:off x="640080" y="5321807"/>
-            <a:ext cx="11155680" cy="384048"/>
-          </a:xfrm>
-          <a:prstGeom prst="rect">
-            <a:avLst/>
-          </a:prstGeom>
-          <a:noFill/>
-        </p:spPr>
-        <p:txBody>
-          <a:bodyPr wrap="square" lIns="0" rIns="0" tIns="0" bIns="0">
-            <a:spAutoFit/>
-          </a:bodyPr>
-          <a:lstStyle/>
-          <a:p>
-            <a:pPr algn="l"/>
-            <a:r>
-              <a:rPr sz="1200" b="0">
-                <a:solidFill>
-                  <a:srgbClr val="3D2200"/>
-                </a:solidFill>
-                <a:latin typeface="Hiragino Sans"/>
-              </a:rPr>
-              <a:t>• **工務店様向けTOP / お問い合わせ**</a:t>
+              <a:t>非公開にしているページ</a:t>
             </a:r>
           </a:p>
         </p:txBody>
@@ -6387,7 +7160,7 @@
                 </a:solidFill>
                 <a:latin typeface="Hiragino Sans"/>
               </a:rPr>
-              <a:t>1. 5月1日リリース版で公開する機能  (3/4)</a:t>
+              <a:t>2. 5月1日リリース版で公開する機能  (2/2)</a:t>
             </a:r>
           </a:p>
         </p:txBody>
@@ -6400,239 +7173,29 @@
         </p:nvSpPr>
         <p:spPr>
           <a:xfrm>
-            <a:off x="365760" y="1097280"/>
-            <a:ext cx="11430000" cy="457200"/>
-          </a:xfrm>
-          <a:prstGeom prst="rect">
-            <a:avLst/>
-          </a:prstGeom>
-          <a:noFill/>
-        </p:spPr>
-        <p:txBody>
-          <a:bodyPr wrap="square" lIns="0" rIns="0" tIns="0" bIns="0">
-            <a:spAutoFit/>
-          </a:bodyPr>
-          <a:lstStyle/>
-          <a:p>
-            <a:pPr algn="l"/>
-            <a:r>
-              <a:rPr sz="1800" b="1">
+            <a:off x="457200" y="1097280"/>
+            <a:ext cx="11338560" cy="457200"/>
+          </a:xfrm>
+          <a:prstGeom prst="rect">
+            <a:avLst/>
+          </a:prstGeom>
+          <a:noFill/>
+        </p:spPr>
+        <p:txBody>
+          <a:bodyPr wrap="square" lIns="0" rIns="0" tIns="0" bIns="0">
+            <a:spAutoFit/>
+          </a:bodyPr>
+          <a:lstStyle/>
+          <a:p>
+            <a:pPr algn="l"/>
+            <a:r>
+              <a:rPr sz="1300" b="0">
                 <a:solidFill>
                   <a:srgbClr val="3D2200"/>
                 </a:solidFill>
                 <a:latin typeface="Hiragino Sans"/>
               </a:rPr>
-              <a:t>非公開にしているページ（順次復活）</a:t>
-            </a:r>
-          </a:p>
-        </p:txBody>
-      </p:sp>
-      <p:sp>
-        <p:nvSpPr>
-          <p:cNvPr id="5" name="TextBox 4"/>
-          <p:cNvSpPr txBox="1"/>
-          <p:nvPr/>
-        </p:nvSpPr>
-        <p:spPr>
-          <a:xfrm>
-            <a:off x="640080" y="1600200"/>
-            <a:ext cx="11155680" cy="384048"/>
-          </a:xfrm>
-          <a:prstGeom prst="rect">
-            <a:avLst/>
-          </a:prstGeom>
-          <a:noFill/>
-        </p:spPr>
-        <p:txBody>
-          <a:bodyPr wrap="square" lIns="0" rIns="0" tIns="0" bIns="0">
-            <a:spAutoFit/>
-          </a:bodyPr>
-          <a:lstStyle/>
-          <a:p>
-            <a:pPr algn="l"/>
-            <a:r>
-              <a:rPr sz="1200" b="0">
-                <a:solidFill>
-                  <a:srgbClr val="3D2200"/>
-                </a:solidFill>
-                <a:latin typeface="Hiragino Sans"/>
-              </a:rPr>
-              <a:t>• 業界ニュース・記事・マガジン・ウェビナー・インタビュー</a:t>
-            </a:r>
-          </a:p>
-        </p:txBody>
-      </p:sp>
-      <p:sp>
-        <p:nvSpPr>
-          <p:cNvPr id="6" name="TextBox 5"/>
-          <p:cNvSpPr txBox="1"/>
-          <p:nvPr/>
-        </p:nvSpPr>
-        <p:spPr>
-          <a:xfrm>
-            <a:off x="640080" y="1984248"/>
-            <a:ext cx="11155680" cy="384048"/>
-          </a:xfrm>
-          <a:prstGeom prst="rect">
-            <a:avLst/>
-          </a:prstGeom>
-          <a:noFill/>
-        </p:spPr>
-        <p:txBody>
-          <a:bodyPr wrap="square" lIns="0" rIns="0" tIns="0" bIns="0">
-            <a:spAutoFit/>
-          </a:bodyPr>
-          <a:lstStyle/>
-          <a:p>
-            <a:pPr algn="l"/>
-            <a:r>
-              <a:rPr sz="1200" b="0">
-                <a:solidFill>
-                  <a:srgbClr val="3D2200"/>
-                </a:solidFill>
-                <a:latin typeface="Hiragino Sans"/>
-              </a:rPr>
-              <a:t>• 販売中の建売・土地情報・特集</a:t>
-            </a:r>
-          </a:p>
-        </p:txBody>
-      </p:sp>
-      <p:sp>
-        <p:nvSpPr>
-          <p:cNvPr id="7" name="TextBox 6"/>
-          <p:cNvSpPr txBox="1"/>
-          <p:nvPr/>
-        </p:nvSpPr>
-        <p:spPr>
-          <a:xfrm>
-            <a:off x="640080" y="2368296"/>
-            <a:ext cx="11155680" cy="384048"/>
-          </a:xfrm>
-          <a:prstGeom prst="rect">
-            <a:avLst/>
-          </a:prstGeom>
-          <a:noFill/>
-        </p:spPr>
-        <p:txBody>
-          <a:bodyPr wrap="square" lIns="0" rIns="0" tIns="0" bIns="0">
-            <a:spAutoFit/>
-          </a:bodyPr>
-          <a:lstStyle/>
-          <a:p>
-            <a:pPr algn="l"/>
-            <a:r>
-              <a:rPr sz="1200" b="0">
-                <a:solidFill>
-                  <a:srgbClr val="3D2200"/>
-                </a:solidFill>
-                <a:latin typeface="Hiragino Sans"/>
-              </a:rPr>
-              <a:t>• ローンシミュレーター</a:t>
-            </a:r>
-          </a:p>
-        </p:txBody>
-      </p:sp>
-      <p:sp>
-        <p:nvSpPr>
-          <p:cNvPr id="8" name="TextBox 7"/>
-          <p:cNvSpPr txBox="1"/>
-          <p:nvPr/>
-        </p:nvSpPr>
-        <p:spPr>
-          <a:xfrm>
-            <a:off x="640080" y="2752344"/>
-            <a:ext cx="11155680" cy="384048"/>
-          </a:xfrm>
-          <a:prstGeom prst="rect">
-            <a:avLst/>
-          </a:prstGeom>
-          <a:noFill/>
-        </p:spPr>
-        <p:txBody>
-          <a:bodyPr wrap="square" lIns="0" rIns="0" tIns="0" bIns="0">
-            <a:spAutoFit/>
-          </a:bodyPr>
-          <a:lstStyle/>
-          <a:p>
-            <a:pPr algn="l"/>
-            <a:r>
-              <a:rPr sz="1200" b="0">
-                <a:solidFill>
-                  <a:srgbClr val="3D2200"/>
-                </a:solidFill>
-                <a:latin typeface="Hiragino Sans"/>
-              </a:rPr>
-              <a:t>• 工務店ダッシュボード内の Q&amp;A・施工事例管理・動画管理</a:t>
-            </a:r>
-          </a:p>
-        </p:txBody>
-      </p:sp>
-      <p:sp>
-        <p:nvSpPr>
-          <p:cNvPr id="9" name="TextBox 8"/>
-          <p:cNvSpPr txBox="1"/>
-          <p:nvPr/>
-        </p:nvSpPr>
-        <p:spPr>
-          <a:xfrm>
-            <a:off x="640080" y="3136391"/>
-            <a:ext cx="11155680" cy="384048"/>
-          </a:xfrm>
-          <a:prstGeom prst="rect">
-            <a:avLst/>
-          </a:prstGeom>
-          <a:noFill/>
-        </p:spPr>
-        <p:txBody>
-          <a:bodyPr wrap="square" lIns="0" rIns="0" tIns="0" bIns="0">
-            <a:spAutoFit/>
-          </a:bodyPr>
-          <a:lstStyle/>
-          <a:p>
-            <a:pPr algn="l"/>
-            <a:r>
-              <a:rPr sz="1200" b="0">
-                <a:solidFill>
-                  <a:srgbClr val="3D2200"/>
-                </a:solidFill>
-                <a:latin typeface="Hiragino Sans"/>
-              </a:rPr>
-              <a:t>• 匿名AI質問機能</a:t>
-            </a:r>
-          </a:p>
-        </p:txBody>
-      </p:sp>
-      <p:sp>
-        <p:nvSpPr>
-          <p:cNvPr id="10" name="TextBox 9"/>
-          <p:cNvSpPr txBox="1"/>
-          <p:nvPr/>
-        </p:nvSpPr>
-        <p:spPr>
-          <a:xfrm>
-            <a:off x="457200" y="3520439"/>
-            <a:ext cx="11338560" cy="457200"/>
-          </a:xfrm>
-          <a:prstGeom prst="rect">
-            <a:avLst/>
-          </a:prstGeom>
-          <a:noFill/>
-        </p:spPr>
-        <p:txBody>
-          <a:bodyPr wrap="square" lIns="0" rIns="0" tIns="0" bIns="0">
-            <a:spAutoFit/>
-          </a:bodyPr>
-          <a:lstStyle/>
-          <a:p>
-            <a:pPr algn="l"/>
-            <a:r>
-              <a:rPr sz="1300" b="0">
-                <a:solidFill>
-                  <a:srgbClr val="3D2200"/>
-                </a:solidFill>
-                <a:latin typeface="Hiragino Sans"/>
-              </a:rPr>
-              <a:t>→ これらは **廃止ではなく、Phase に応じて復活させます**。 復活スケジュールは後述の「フェーズ別機能追加」をご確認ください。</a:t>
+              <a:t>業界ニュース・記事・マガジン・ウェビナー・インタビュー・シミュレーター・匿名AI質問機能 は Phase 2 以降で順次復活します。削除ではなく一時的な非公開です。</a:t>
             </a:r>
           </a:p>
         </p:txBody>
@@ -6728,7 +7291,182 @@
                 </a:solidFill>
                 <a:latin typeface="Hiragino Sans"/>
               </a:rPr>
-              <a:t>1. 5月1日リリース版で公開する機能  (4/4)</a:t>
+              <a:t>3. なぜ絞り込むのか  (1/2)</a:t>
+            </a:r>
+          </a:p>
+        </p:txBody>
+      </p:sp>
+      <p:sp>
+        <p:nvSpPr>
+          <p:cNvPr id="4" name="TextBox 3"/>
+          <p:cNvSpPr txBox="1"/>
+          <p:nvPr/>
+        </p:nvSpPr>
+        <p:spPr>
+          <a:xfrm>
+            <a:off x="365760" y="1097280"/>
+            <a:ext cx="11430000" cy="457200"/>
+          </a:xfrm>
+          <a:prstGeom prst="rect">
+            <a:avLst/>
+          </a:prstGeom>
+          <a:noFill/>
+        </p:spPr>
+        <p:txBody>
+          <a:bodyPr wrap="square" lIns="0" rIns="0" tIns="0" bIns="0">
+            <a:spAutoFit/>
+          </a:bodyPr>
+          <a:lstStyle/>
+          <a:p>
+            <a:pPr algn="l"/>
+            <a:r>
+              <a:rPr sz="1800" b="1">
+                <a:solidFill>
+                  <a:srgbClr val="3D2200"/>
+                </a:solidFill>
+                <a:latin typeface="Hiragino Sans"/>
+              </a:rPr>
+              <a:t>理由 1: ユーザーに迷子にならないサイト体験を</a:t>
+            </a:r>
+          </a:p>
+        </p:txBody>
+      </p:sp>
+      <p:sp>
+        <p:nvSpPr>
+          <p:cNvPr id="5" name="TextBox 4"/>
+          <p:cNvSpPr txBox="1"/>
+          <p:nvPr/>
+        </p:nvSpPr>
+        <p:spPr>
+          <a:xfrm>
+            <a:off x="457200" y="1600200"/>
+            <a:ext cx="11338560" cy="457200"/>
+          </a:xfrm>
+          <a:prstGeom prst="rect">
+            <a:avLst/>
+          </a:prstGeom>
+          <a:noFill/>
+        </p:spPr>
+        <p:txBody>
+          <a:bodyPr wrap="square" lIns="0" rIns="0" tIns="0" bIns="0">
+            <a:spAutoFit/>
+          </a:bodyPr>
+          <a:lstStyle/>
+          <a:p>
+            <a:pPr algn="l"/>
+            <a:r>
+              <a:rPr sz="1300" b="0">
+                <a:solidFill>
+                  <a:srgbClr val="3D2200"/>
+                </a:solidFill>
+                <a:latin typeface="Hiragino Sans"/>
+              </a:rPr>
+              <a:t>開設初日のユーザーにとって「何から見ればいいかわからない」状態が一番の離脱要因です。MVP では「動画 → AI診断 / 無料相談 → 工務店 → 見学会予約」の核ループに集中させます。</a:t>
+            </a:r>
+          </a:p>
+        </p:txBody>
+      </p:sp>
+      <p:sp>
+        <p:nvSpPr>
+          <p:cNvPr id="6" name="TextBox 5"/>
+          <p:cNvSpPr txBox="1"/>
+          <p:nvPr/>
+        </p:nvSpPr>
+        <p:spPr>
+          <a:xfrm>
+            <a:off x="365760" y="2103120"/>
+            <a:ext cx="11430000" cy="457200"/>
+          </a:xfrm>
+          <a:prstGeom prst="rect">
+            <a:avLst/>
+          </a:prstGeom>
+          <a:noFill/>
+        </p:spPr>
+        <p:txBody>
+          <a:bodyPr wrap="square" lIns="0" rIns="0" tIns="0" bIns="0">
+            <a:spAutoFit/>
+          </a:bodyPr>
+          <a:lstStyle/>
+          <a:p>
+            <a:pPr algn="l"/>
+            <a:r>
+              <a:rPr sz="1800" b="1">
+                <a:solidFill>
+                  <a:srgbClr val="3D2200"/>
+                </a:solidFill>
+                <a:latin typeface="Hiragino Sans"/>
+              </a:rPr>
+              <a:t>理由 2: 品質を担保して少しずつ広げる</a:t>
+            </a:r>
+          </a:p>
+        </p:txBody>
+      </p:sp>
+      <p:sp>
+        <p:nvSpPr>
+          <p:cNvPr id="7" name="TextBox 6"/>
+          <p:cNvSpPr txBox="1"/>
+          <p:nvPr/>
+        </p:nvSpPr>
+        <p:spPr>
+          <a:xfrm>
+            <a:off x="457200" y="2606039"/>
+            <a:ext cx="11338560" cy="457200"/>
+          </a:xfrm>
+          <a:prstGeom prst="rect">
+            <a:avLst/>
+          </a:prstGeom>
+          <a:noFill/>
+        </p:spPr>
+        <p:txBody>
+          <a:bodyPr wrap="square" lIns="0" rIns="0" tIns="0" bIns="0">
+            <a:spAutoFit/>
+          </a:bodyPr>
+          <a:lstStyle/>
+          <a:p>
+            <a:pPr algn="l"/>
+            <a:r>
+              <a:rPr sz="1300" b="0">
+                <a:solidFill>
+                  <a:srgbClr val="3D2200"/>
+                </a:solidFill>
+                <a:latin typeface="Hiragino Sans"/>
+              </a:rPr>
+              <a:t>各機能には記事・画像・データの準備が必要です。Phase 1 は 10 社との連携品質を上げることに集中し、Phase 2 以降に順次公開します。</a:t>
+            </a:r>
+          </a:p>
+        </p:txBody>
+      </p:sp>
+      <p:sp>
+        <p:nvSpPr>
+          <p:cNvPr id="8" name="TextBox 7"/>
+          <p:cNvSpPr txBox="1"/>
+          <p:nvPr/>
+        </p:nvSpPr>
+        <p:spPr>
+          <a:xfrm>
+            <a:off x="365760" y="3108959"/>
+            <a:ext cx="11430000" cy="457200"/>
+          </a:xfrm>
+          <a:prstGeom prst="rect">
+            <a:avLst/>
+          </a:prstGeom>
+          <a:noFill/>
+        </p:spPr>
+        <p:txBody>
+          <a:bodyPr wrap="square" lIns="0" rIns="0" tIns="0" bIns="0">
+            <a:spAutoFit/>
+          </a:bodyPr>
+          <a:lstStyle/>
+          <a:p>
+            <a:pPr algn="l"/>
+            <a:r>
+              <a:rPr sz="1800" b="1">
+                <a:solidFill>
+                  <a:srgbClr val="3D2200"/>
+                </a:solidFill>
+                <a:latin typeface="Hiragino Sans"/>
+              </a:rPr>
+              <a:t>理由 3: 成果を測りながら料金プランを進化させる</a:t>
             </a:r>
           </a:p>
         </p:txBody>
@@ -6824,7 +7562,7 @@
                 </a:solidFill>
                 <a:latin typeface="Hiragino Sans"/>
               </a:rPr>
-              <a:t>2. なぜ絞り込むのか  (1/2)</a:t>
+              <a:t>3. なぜ絞り込むのか  (2/2)</a:t>
             </a:r>
           </a:p>
         </p:txBody>
@@ -6837,169 +7575,29 @@
         </p:nvSpPr>
         <p:spPr>
           <a:xfrm>
-            <a:off x="365760" y="1097280"/>
-            <a:ext cx="11430000" cy="457200"/>
-          </a:xfrm>
-          <a:prstGeom prst="rect">
-            <a:avLst/>
-          </a:prstGeom>
-          <a:noFill/>
-        </p:spPr>
-        <p:txBody>
-          <a:bodyPr wrap="square" lIns="0" rIns="0" tIns="0" bIns="0">
-            <a:spAutoFit/>
-          </a:bodyPr>
-          <a:lstStyle/>
-          <a:p>
-            <a:pPr algn="l"/>
-            <a:r>
-              <a:rPr sz="1800" b="1">
+            <a:off x="457200" y="1097280"/>
+            <a:ext cx="11338560" cy="457200"/>
+          </a:xfrm>
+          <a:prstGeom prst="rect">
+            <a:avLst/>
+          </a:prstGeom>
+          <a:noFill/>
+        </p:spPr>
+        <p:txBody>
+          <a:bodyPr wrap="square" lIns="0" rIns="0" tIns="0" bIns="0">
+            <a:spAutoFit/>
+          </a:bodyPr>
+          <a:lstStyle/>
+          <a:p>
+            <a:pPr algn="l"/>
+            <a:r>
+              <a:rPr sz="1300" b="0">
                 <a:solidFill>
                   <a:srgbClr val="3D2200"/>
                 </a:solidFill>
                 <a:latin typeface="Hiragino Sans"/>
               </a:rPr>
-              <a:t>理由1: ユーザーに迷子にならないサイト体験を</a:t>
-            </a:r>
-          </a:p>
-        </p:txBody>
-      </p:sp>
-      <p:sp>
-        <p:nvSpPr>
-          <p:cNvPr id="5" name="TextBox 4"/>
-          <p:cNvSpPr txBox="1"/>
-          <p:nvPr/>
-        </p:nvSpPr>
-        <p:spPr>
-          <a:xfrm>
-            <a:off x="457200" y="1600200"/>
-            <a:ext cx="11338560" cy="457200"/>
-          </a:xfrm>
-          <a:prstGeom prst="rect">
-            <a:avLst/>
-          </a:prstGeom>
-          <a:noFill/>
-        </p:spPr>
-        <p:txBody>
-          <a:bodyPr wrap="square" lIns="0" rIns="0" tIns="0" bIns="0">
-            <a:spAutoFit/>
-          </a:bodyPr>
-          <a:lstStyle/>
-          <a:p>
-            <a:pPr algn="l"/>
-            <a:r>
-              <a:rPr sz="1300" b="0">
-                <a:solidFill>
-                  <a:srgbClr val="3D2200"/>
-                </a:solidFill>
-                <a:latin typeface="Hiragino Sans"/>
-              </a:rPr>
-              <a:t>開設初日のユーザーにとって「何から見ればいいかわからない」状態が一番の離脱要因です。 MVP では **『動画を見る → 工務店を知る → 見学会を予約する』** の3ステップだけが目に入るようにしました。</a:t>
-            </a:r>
-          </a:p>
-        </p:txBody>
-      </p:sp>
-      <p:sp>
-        <p:nvSpPr>
-          <p:cNvPr id="6" name="TextBox 5"/>
-          <p:cNvSpPr txBox="1"/>
-          <p:nvPr/>
-        </p:nvSpPr>
-        <p:spPr>
-          <a:xfrm>
-            <a:off x="365760" y="2103120"/>
-            <a:ext cx="11430000" cy="457200"/>
-          </a:xfrm>
-          <a:prstGeom prst="rect">
-            <a:avLst/>
-          </a:prstGeom>
-          <a:noFill/>
-        </p:spPr>
-        <p:txBody>
-          <a:bodyPr wrap="square" lIns="0" rIns="0" tIns="0" bIns="0">
-            <a:spAutoFit/>
-          </a:bodyPr>
-          <a:lstStyle/>
-          <a:p>
-            <a:pPr algn="l"/>
-            <a:r>
-              <a:rPr sz="1800" b="1">
-                <a:solidFill>
-                  <a:srgbClr val="3D2200"/>
-                </a:solidFill>
-                <a:latin typeface="Hiragino Sans"/>
-              </a:rPr>
-              <a:t>理由2: 品質を担保して少しずつ広げる</a:t>
-            </a:r>
-          </a:p>
-        </p:txBody>
-      </p:sp>
-      <p:sp>
-        <p:nvSpPr>
-          <p:cNvPr id="7" name="TextBox 6"/>
-          <p:cNvSpPr txBox="1"/>
-          <p:nvPr/>
-        </p:nvSpPr>
-        <p:spPr>
-          <a:xfrm>
-            <a:off x="457200" y="2606039"/>
-            <a:ext cx="11338560" cy="457200"/>
-          </a:xfrm>
-          <a:prstGeom prst="rect">
-            <a:avLst/>
-          </a:prstGeom>
-          <a:noFill/>
-        </p:spPr>
-        <p:txBody>
-          <a:bodyPr wrap="square" lIns="0" rIns="0" tIns="0" bIns="0">
-            <a:spAutoFit/>
-          </a:bodyPr>
-          <a:lstStyle/>
-          <a:p>
-            <a:pPr algn="l"/>
-            <a:r>
-              <a:rPr sz="1300" b="0">
-                <a:solidFill>
-                  <a:srgbClr val="3D2200"/>
-                </a:solidFill>
-                <a:latin typeface="Hiragino Sans"/>
-              </a:rPr>
-              <a:t>各機能には記事・画像・データの準備が必要です。 Phase 1（5〜6月）は10社との連携品質を上げることに集中し、 Phase 2（7〜8月）以降に記事・建売・特集を順次公開します。</a:t>
-            </a:r>
-          </a:p>
-        </p:txBody>
-      </p:sp>
-      <p:sp>
-        <p:nvSpPr>
-          <p:cNvPr id="8" name="TextBox 7"/>
-          <p:cNvSpPr txBox="1"/>
-          <p:nvPr/>
-        </p:nvSpPr>
-        <p:spPr>
-          <a:xfrm>
-            <a:off x="365760" y="3108959"/>
-            <a:ext cx="11430000" cy="457200"/>
-          </a:xfrm>
-          <a:prstGeom prst="rect">
-            <a:avLst/>
-          </a:prstGeom>
-          <a:noFill/>
-        </p:spPr>
-        <p:txBody>
-          <a:bodyPr wrap="square" lIns="0" rIns="0" tIns="0" bIns="0">
-            <a:spAutoFit/>
-          </a:bodyPr>
-          <a:lstStyle/>
-          <a:p>
-            <a:pPr algn="l"/>
-            <a:r>
-              <a:rPr sz="1800" b="1">
-                <a:solidFill>
-                  <a:srgbClr val="3D2200"/>
-                </a:solidFill>
-                <a:latin typeface="Hiragino Sans"/>
-              </a:rPr>
-              <a:t>理由3: 成果を測りながら料金プランを進化させる</a:t>
+              <a:t>Phase 1 は見学会予約のみの課金。Phase 2 で撮影、Phase 3 で月額掲載と成果報酬、Phase 4 で SaaS。全員同一料金でシンプルです。</a:t>
             </a:r>
           </a:p>
         </p:txBody>
@@ -7095,7 +7693,7 @@
                 </a:solidFill>
                 <a:latin typeface="Hiragino Sans"/>
               </a:rPr>
-              <a:t>2. なぜ絞り込むのか  (2/2)</a:t>
+              <a:t>4. 資料請求は主役から外しています (重要)  (1/2)</a:t>
             </a:r>
           </a:p>
         </p:txBody>
@@ -7130,7 +7728,182 @@
                 </a:solidFill>
                 <a:latin typeface="Hiragino Sans"/>
               </a:rPr>
-              <a:t>Phase 1 では見学会予約の成果を測り、 Phase 2 で撮影プラン、Phase 3 で月額掲載プランを段階導入します。 **御社は常に優遇価格が適用** されますのでご安心ください。</a:t>
+              <a:t>工務店ヒアリングの結果、**資料請求はリード質が低い** ことが判明したため、MVP v2 では資料請求を主要 KPI から外しました。</a:t>
+            </a:r>
+          </a:p>
+        </p:txBody>
+      </p:sp>
+      <p:sp>
+        <p:nvSpPr>
+          <p:cNvPr id="5" name="TextBox 4"/>
+          <p:cNvSpPr txBox="1"/>
+          <p:nvPr/>
+        </p:nvSpPr>
+        <p:spPr>
+          <a:xfrm>
+            <a:off x="365760" y="1600200"/>
+            <a:ext cx="11430000" cy="457200"/>
+          </a:xfrm>
+          <a:prstGeom prst="rect">
+            <a:avLst/>
+          </a:prstGeom>
+          <a:noFill/>
+        </p:spPr>
+        <p:txBody>
+          <a:bodyPr wrap="square" lIns="0" rIns="0" tIns="0" bIns="0">
+            <a:spAutoFit/>
+          </a:bodyPr>
+          <a:lstStyle/>
+          <a:p>
+            <a:pPr algn="l"/>
+            <a:r>
+              <a:rPr sz="1800" b="1">
+                <a:solidFill>
+                  <a:srgbClr val="3D2200"/>
+                </a:solidFill>
+                <a:latin typeface="Hiragino Sans"/>
+              </a:rPr>
+              <a:t>なぜ資料請求を主軸にしないのか</a:t>
+            </a:r>
+          </a:p>
+        </p:txBody>
+      </p:sp>
+      <p:sp>
+        <p:nvSpPr>
+          <p:cNvPr id="6" name="TextBox 5"/>
+          <p:cNvSpPr txBox="1"/>
+          <p:nvPr/>
+        </p:nvSpPr>
+        <p:spPr>
+          <a:xfrm>
+            <a:off x="640080" y="2103120"/>
+            <a:ext cx="11155680" cy="384048"/>
+          </a:xfrm>
+          <a:prstGeom prst="rect">
+            <a:avLst/>
+          </a:prstGeom>
+          <a:noFill/>
+        </p:spPr>
+        <p:txBody>
+          <a:bodyPr wrap="square" lIns="0" rIns="0" tIns="0" bIns="0">
+            <a:spAutoFit/>
+          </a:bodyPr>
+          <a:lstStyle/>
+          <a:p>
+            <a:pPr algn="l"/>
+            <a:r>
+              <a:rPr sz="1200" b="0">
+                <a:solidFill>
+                  <a:srgbClr val="3D2200"/>
+                </a:solidFill>
+                <a:latin typeface="Hiragino Sans"/>
+              </a:rPr>
+              <a:t>• 資料請求ユーザーは情報収集段階が早く、成約までの時間が長い</a:t>
+            </a:r>
+          </a:p>
+        </p:txBody>
+      </p:sp>
+      <p:sp>
+        <p:nvSpPr>
+          <p:cNvPr id="7" name="TextBox 6"/>
+          <p:cNvSpPr txBox="1"/>
+          <p:nvPr/>
+        </p:nvSpPr>
+        <p:spPr>
+          <a:xfrm>
+            <a:off x="640080" y="2487168"/>
+            <a:ext cx="11155680" cy="384048"/>
+          </a:xfrm>
+          <a:prstGeom prst="rect">
+            <a:avLst/>
+          </a:prstGeom>
+          <a:noFill/>
+        </p:spPr>
+        <p:txBody>
+          <a:bodyPr wrap="square" lIns="0" rIns="0" tIns="0" bIns="0">
+            <a:spAutoFit/>
+          </a:bodyPr>
+          <a:lstStyle/>
+          <a:p>
+            <a:pPr algn="l"/>
+            <a:r>
+              <a:rPr sz="1200" b="0">
+                <a:solidFill>
+                  <a:srgbClr val="3D2200"/>
+                </a:solidFill>
+                <a:latin typeface="Hiragino Sans"/>
+              </a:rPr>
+              <a:t>• 複数社に一括で送るユーザーが多く、個社との関係が築きにくい</a:t>
+            </a:r>
+          </a:p>
+        </p:txBody>
+      </p:sp>
+      <p:sp>
+        <p:nvSpPr>
+          <p:cNvPr id="8" name="TextBox 7"/>
+          <p:cNvSpPr txBox="1"/>
+          <p:nvPr/>
+        </p:nvSpPr>
+        <p:spPr>
+          <a:xfrm>
+            <a:off x="640080" y="2871215"/>
+            <a:ext cx="11155680" cy="384048"/>
+          </a:xfrm>
+          <a:prstGeom prst="rect">
+            <a:avLst/>
+          </a:prstGeom>
+          <a:noFill/>
+        </p:spPr>
+        <p:txBody>
+          <a:bodyPr wrap="square" lIns="0" rIns="0" tIns="0" bIns="0">
+            <a:spAutoFit/>
+          </a:bodyPr>
+          <a:lstStyle/>
+          <a:p>
+            <a:pPr algn="l"/>
+            <a:r>
+              <a:rPr sz="1200" b="0">
+                <a:solidFill>
+                  <a:srgbClr val="3D2200"/>
+                </a:solidFill>
+                <a:latin typeface="Hiragino Sans"/>
+              </a:rPr>
+              <a:t>• 資料送付コストに対して成約率が低く、費用対効果が合わない</a:t>
+            </a:r>
+          </a:p>
+        </p:txBody>
+      </p:sp>
+      <p:sp>
+        <p:nvSpPr>
+          <p:cNvPr id="9" name="TextBox 8"/>
+          <p:cNvSpPr txBox="1"/>
+          <p:nvPr/>
+        </p:nvSpPr>
+        <p:spPr>
+          <a:xfrm>
+            <a:off x="365760" y="3255263"/>
+            <a:ext cx="11430000" cy="457200"/>
+          </a:xfrm>
+          <a:prstGeom prst="rect">
+            <a:avLst/>
+          </a:prstGeom>
+          <a:noFill/>
+        </p:spPr>
+        <p:txBody>
+          <a:bodyPr wrap="square" lIns="0" rIns="0" tIns="0" bIns="0">
+            <a:spAutoFit/>
+          </a:bodyPr>
+          <a:lstStyle/>
+          <a:p>
+            <a:pPr algn="l"/>
+            <a:r>
+              <a:rPr sz="1800" b="1">
+                <a:solidFill>
+                  <a:srgbClr val="3D2200"/>
+                </a:solidFill>
+                <a:latin typeface="Hiragino Sans"/>
+              </a:rPr>
+              <a:t>代わりに主軸にしているもの</a:t>
             </a:r>
           </a:p>
         </p:txBody>
@@ -7155,20 +7928,20 @@
       <p:grpSpPr/>
       <p:sp>
         <p:nvSpPr>
-          <p:cNvPr id="9" name="Rectangle 8"/>
+          <p:cNvPr id="2" name="Rectangle 1"/>
           <p:cNvSpPr/>
           <p:nvPr/>
         </p:nvSpPr>
         <p:spPr>
           <a:xfrm>
-            <a:off x="7924800" y="1097280"/>
-            <a:ext cx="3779520" cy="384048"/>
+            <a:off x="0" y="0"/>
+            <a:ext cx="12191695" cy="731520"/>
           </a:xfrm>
           <a:prstGeom prst="rect">
             <a:avLst/>
           </a:prstGeom>
           <a:solidFill>
-            <a:srgbClr val="FFF8F0"/>
+            <a:srgbClr val="E8740C"/>
           </a:solidFill>
           <a:ln>
             <a:noFill/>
@@ -7198,135 +7971,6 @@
       </p:sp>
       <p:sp>
         <p:nvSpPr>
-          <p:cNvPr id="7" name="Rectangle 6"/>
-          <p:cNvSpPr/>
-          <p:nvPr/>
-        </p:nvSpPr>
-        <p:spPr>
-          <a:xfrm>
-            <a:off x="4145280" y="1097280"/>
-            <a:ext cx="3779520" cy="384048"/>
-          </a:xfrm>
-          <a:prstGeom prst="rect">
-            <a:avLst/>
-          </a:prstGeom>
-          <a:solidFill>
-            <a:srgbClr val="FFF8F0"/>
-          </a:solidFill>
-          <a:ln>
-            <a:noFill/>
-          </a:ln>
-        </p:spPr>
-        <p:style>
-          <a:lnRef idx="1">
-            <a:schemeClr val="accent1"/>
-          </a:lnRef>
-          <a:fillRef idx="3">
-            <a:schemeClr val="accent1"/>
-          </a:fillRef>
-          <a:effectRef idx="2">
-            <a:schemeClr val="accent1"/>
-          </a:effectRef>
-          <a:fontRef idx="minor">
-            <a:schemeClr val="lt1"/>
-          </a:fontRef>
-        </p:style>
-        <p:txBody>
-          <a:bodyPr rtlCol="0" anchor="ctr"/>
-          <a:lstStyle/>
-          <a:p>
-            <a:pPr algn="ctr"/>
-          </a:p>
-        </p:txBody>
-      </p:sp>
-      <p:sp>
-        <p:nvSpPr>
-          <p:cNvPr id="5" name="Rectangle 4"/>
-          <p:cNvSpPr/>
-          <p:nvPr/>
-        </p:nvSpPr>
-        <p:spPr>
-          <a:xfrm>
-            <a:off x="365760" y="1097280"/>
-            <a:ext cx="3779520" cy="384048"/>
-          </a:xfrm>
-          <a:prstGeom prst="rect">
-            <a:avLst/>
-          </a:prstGeom>
-          <a:solidFill>
-            <a:srgbClr val="FFF8F0"/>
-          </a:solidFill>
-          <a:ln>
-            <a:noFill/>
-          </a:ln>
-        </p:spPr>
-        <p:style>
-          <a:lnRef idx="1">
-            <a:schemeClr val="accent1"/>
-          </a:lnRef>
-          <a:fillRef idx="3">
-            <a:schemeClr val="accent1"/>
-          </a:fillRef>
-          <a:effectRef idx="2">
-            <a:schemeClr val="accent1"/>
-          </a:effectRef>
-          <a:fontRef idx="minor">
-            <a:schemeClr val="lt1"/>
-          </a:fontRef>
-        </p:style>
-        <p:txBody>
-          <a:bodyPr rtlCol="0" anchor="ctr"/>
-          <a:lstStyle/>
-          <a:p>
-            <a:pPr algn="ctr"/>
-          </a:p>
-        </p:txBody>
-      </p:sp>
-      <p:sp>
-        <p:nvSpPr>
-          <p:cNvPr id="2" name="Rectangle 1"/>
-          <p:cNvSpPr/>
-          <p:nvPr/>
-        </p:nvSpPr>
-        <p:spPr>
-          <a:xfrm>
-            <a:off x="0" y="0"/>
-            <a:ext cx="12191695" cy="731520"/>
-          </a:xfrm>
-          <a:prstGeom prst="rect">
-            <a:avLst/>
-          </a:prstGeom>
-          <a:solidFill>
-            <a:srgbClr val="E8740C"/>
-          </a:solidFill>
-          <a:ln>
-            <a:noFill/>
-          </a:ln>
-        </p:spPr>
-        <p:style>
-          <a:lnRef idx="1">
-            <a:schemeClr val="accent1"/>
-          </a:lnRef>
-          <a:fillRef idx="3">
-            <a:schemeClr val="accent1"/>
-          </a:fillRef>
-          <a:effectRef idx="2">
-            <a:schemeClr val="accent1"/>
-          </a:effectRef>
-          <a:fontRef idx="minor">
-            <a:schemeClr val="lt1"/>
-          </a:fontRef>
-        </p:style>
-        <p:txBody>
-          <a:bodyPr rtlCol="0" anchor="ctr"/>
-          <a:lstStyle/>
-          <a:p>
-            <a:pPr algn="ctr"/>
-          </a:p>
-        </p:txBody>
-      </p:sp>
-      <p:sp>
-        <p:nvSpPr>
           <p:cNvPr id="3" name="TextBox 2"/>
           <p:cNvSpPr txBox="1"/>
           <p:nvPr/>
@@ -7355,7 +7999,7 @@
                 </a:solidFill>
                 <a:latin typeface="Hiragino Sans"/>
               </a:rPr>
-              <a:t>3. フェーズ別 機能追加スケジュール</a:t>
+              <a:t>4. 資料請求は主役から外しています (重要)  (2/2)</a:t>
             </a:r>
           </a:p>
         </p:txBody>
@@ -7368,29 +8012,64 @@
         </p:nvSpPr>
         <p:spPr>
           <a:xfrm>
-            <a:off x="365760" y="1097280"/>
-            <a:ext cx="3779520" cy="384048"/>
-          </a:xfrm>
-          <a:prstGeom prst="rect">
-            <a:avLst/>
-          </a:prstGeom>
-          <a:noFill/>
-        </p:spPr>
-        <p:txBody>
-          <a:bodyPr wrap="square" lIns="0" rIns="0" tIns="0" bIns="0">
-            <a:spAutoFit/>
-          </a:bodyPr>
-          <a:lstStyle/>
-          <a:p>
-            <a:pPr algn="l"/>
-            <a:r>
-              <a:rPr sz="1000" b="1">
+            <a:off x="640080" y="1097280"/>
+            <a:ext cx="11155680" cy="384048"/>
+          </a:xfrm>
+          <a:prstGeom prst="rect">
+            <a:avLst/>
+          </a:prstGeom>
+          <a:noFill/>
+        </p:spPr>
+        <p:txBody>
+          <a:bodyPr wrap="square" lIns="0" rIns="0" tIns="0" bIns="0">
+            <a:spAutoFit/>
+          </a:bodyPr>
+          <a:lstStyle/>
+          <a:p>
+            <a:pPr algn="l"/>
+            <a:r>
+              <a:rPr sz="1200" b="0">
                 <a:solidFill>
                   <a:srgbClr val="3D2200"/>
                 </a:solidFill>
                 <a:latin typeface="Hiragino Sans"/>
               </a:rPr>
-              <a:t>Phase</a:t>
+              <a:t>• 見学会予約 (¥50,000/件 の課金源)</a:t>
+            </a:r>
+          </a:p>
+        </p:txBody>
+      </p:sp>
+      <p:sp>
+        <p:nvSpPr>
+          <p:cNvPr id="5" name="TextBox 4"/>
+          <p:cNvSpPr txBox="1"/>
+          <p:nvPr/>
+        </p:nvSpPr>
+        <p:spPr>
+          <a:xfrm>
+            <a:off x="640080" y="1481328"/>
+            <a:ext cx="11155680" cy="384048"/>
+          </a:xfrm>
+          <a:prstGeom prst="rect">
+            <a:avLst/>
+          </a:prstGeom>
+          <a:noFill/>
+        </p:spPr>
+        <p:txBody>
+          <a:bodyPr wrap="square" lIns="0" rIns="0" tIns="0" bIns="0">
+            <a:spAutoFit/>
+          </a:bodyPr>
+          <a:lstStyle/>
+          <a:p>
+            <a:pPr algn="l"/>
+            <a:r>
+              <a:rPr sz="1200" b="0">
+                <a:solidFill>
+                  <a:srgbClr val="3D2200"/>
+                </a:solidFill>
+                <a:latin typeface="Hiragino Sans"/>
+              </a:rPr>
+              <a:t>• 無料相談 (成果報酬 3% の発生対象)</a:t>
             </a:r>
           </a:p>
         </p:txBody>
@@ -7403,589 +8082,64 @@
         </p:nvSpPr>
         <p:spPr>
           <a:xfrm>
-            <a:off x="4145280" y="1097280"/>
-            <a:ext cx="3779520" cy="384048"/>
-          </a:xfrm>
-          <a:prstGeom prst="rect">
-            <a:avLst/>
-          </a:prstGeom>
-          <a:noFill/>
-        </p:spPr>
-        <p:txBody>
-          <a:bodyPr wrap="square" lIns="0" rIns="0" tIns="0" bIns="0">
-            <a:spAutoFit/>
-          </a:bodyPr>
-          <a:lstStyle/>
-          <a:p>
-            <a:pPr algn="l"/>
-            <a:r>
-              <a:rPr sz="1000" b="1">
+            <a:off x="640080" y="1865376"/>
+            <a:ext cx="11155680" cy="384048"/>
+          </a:xfrm>
+          <a:prstGeom prst="rect">
+            <a:avLst/>
+          </a:prstGeom>
+          <a:noFill/>
+        </p:spPr>
+        <p:txBody>
+          <a:bodyPr wrap="square" lIns="0" rIns="0" tIns="0" bIns="0">
+            <a:spAutoFit/>
+          </a:bodyPr>
+          <a:lstStyle/>
+          <a:p>
+            <a:pPr algn="l"/>
+            <a:r>
+              <a:rPr sz="1200" b="0">
                 <a:solidFill>
                   <a:srgbClr val="3D2200"/>
                 </a:solidFill>
                 <a:latin typeface="Hiragino Sans"/>
               </a:rPr>
-              <a:t>期間</a:t>
-            </a:r>
-          </a:p>
-        </p:txBody>
-      </p:sp>
-      <p:sp>
-        <p:nvSpPr>
-          <p:cNvPr id="8" name="TextBox 7"/>
-          <p:cNvSpPr txBox="1"/>
-          <p:nvPr/>
-        </p:nvSpPr>
-        <p:spPr>
-          <a:xfrm>
-            <a:off x="7924800" y="1097280"/>
-            <a:ext cx="3779520" cy="384048"/>
-          </a:xfrm>
-          <a:prstGeom prst="rect">
-            <a:avLst/>
-          </a:prstGeom>
-          <a:noFill/>
-        </p:spPr>
-        <p:txBody>
-          <a:bodyPr wrap="square" lIns="0" rIns="0" tIns="0" bIns="0">
-            <a:spAutoFit/>
-          </a:bodyPr>
-          <a:lstStyle/>
-          <a:p>
-            <a:pPr algn="l"/>
-            <a:r>
-              <a:rPr sz="1000" b="1">
+              <a:t>• AI 家づくり診断 (マッチング精度の源)</a:t>
+            </a:r>
+          </a:p>
+        </p:txBody>
+      </p:sp>
+      <p:sp>
+        <p:nvSpPr>
+          <p:cNvPr id="7" name="TextBox 6"/>
+          <p:cNvSpPr txBox="1"/>
+          <p:nvPr/>
+        </p:nvSpPr>
+        <p:spPr>
+          <a:xfrm>
+            <a:off x="640080" y="2249424"/>
+            <a:ext cx="11155680" cy="384048"/>
+          </a:xfrm>
+          <a:prstGeom prst="rect">
+            <a:avLst/>
+          </a:prstGeom>
+          <a:noFill/>
+        </p:spPr>
+        <p:txBody>
+          <a:bodyPr wrap="square" lIns="0" rIns="0" tIns="0" bIns="0">
+            <a:spAutoFit/>
+          </a:bodyPr>
+          <a:lstStyle/>
+          <a:p>
+            <a:pPr algn="l"/>
+            <a:r>
+              <a:rPr sz="1200" b="0">
                 <a:solidFill>
                   <a:srgbClr val="3D2200"/>
                 </a:solidFill>
                 <a:latin typeface="Hiragino Sans"/>
               </a:rPr>
-              <a:t>追加される機能</a:t>
-            </a:r>
-          </a:p>
-        </p:txBody>
-      </p:sp>
-      <p:sp>
-        <p:nvSpPr>
-          <p:cNvPr id="10" name="TextBox 9"/>
-          <p:cNvSpPr txBox="1"/>
-          <p:nvPr/>
-        </p:nvSpPr>
-        <p:spPr>
-          <a:xfrm>
-            <a:off x="365760" y="1481328"/>
-            <a:ext cx="3779520" cy="384048"/>
-          </a:xfrm>
-          <a:prstGeom prst="rect">
-            <a:avLst/>
-          </a:prstGeom>
-          <a:noFill/>
-        </p:spPr>
-        <p:txBody>
-          <a:bodyPr wrap="square" lIns="0" rIns="0" tIns="0" bIns="0">
-            <a:spAutoFit/>
-          </a:bodyPr>
-          <a:lstStyle/>
-          <a:p>
-            <a:pPr algn="l"/>
-            <a:r>
-              <a:rPr sz="1000" b="0">
-                <a:solidFill>
-                  <a:srgbClr val="3D2200"/>
-                </a:solidFill>
-                <a:latin typeface="Hiragino Sans"/>
-              </a:rPr>
-              <a:t>Phase 1</a:t>
-            </a:r>
-          </a:p>
-        </p:txBody>
-      </p:sp>
-      <p:sp>
-        <p:nvSpPr>
-          <p:cNvPr id="11" name="TextBox 10"/>
-          <p:cNvSpPr txBox="1"/>
-          <p:nvPr/>
-        </p:nvSpPr>
-        <p:spPr>
-          <a:xfrm>
-            <a:off x="4145280" y="1481328"/>
-            <a:ext cx="3779520" cy="384048"/>
-          </a:xfrm>
-          <a:prstGeom prst="rect">
-            <a:avLst/>
-          </a:prstGeom>
-          <a:noFill/>
-        </p:spPr>
-        <p:txBody>
-          <a:bodyPr wrap="square" lIns="0" rIns="0" tIns="0" bIns="0">
-            <a:spAutoFit/>
-          </a:bodyPr>
-          <a:lstStyle/>
-          <a:p>
-            <a:pPr algn="l"/>
-            <a:r>
-              <a:rPr sz="1000" b="0">
-                <a:solidFill>
-                  <a:srgbClr val="3D2200"/>
-                </a:solidFill>
-                <a:latin typeface="Hiragino Sans"/>
-              </a:rPr>
-              <a:t>2026/05/01〜06/30</a:t>
-            </a:r>
-          </a:p>
-        </p:txBody>
-      </p:sp>
-      <p:sp>
-        <p:nvSpPr>
-          <p:cNvPr id="12" name="TextBox 11"/>
-          <p:cNvSpPr txBox="1"/>
-          <p:nvPr/>
-        </p:nvSpPr>
-        <p:spPr>
-          <a:xfrm>
-            <a:off x="7924800" y="1481328"/>
-            <a:ext cx="3779520" cy="384048"/>
-          </a:xfrm>
-          <a:prstGeom prst="rect">
-            <a:avLst/>
-          </a:prstGeom>
-          <a:noFill/>
-        </p:spPr>
-        <p:txBody>
-          <a:bodyPr wrap="square" lIns="0" rIns="0" tIns="0" bIns="0">
-            <a:spAutoFit/>
-          </a:bodyPr>
-          <a:lstStyle/>
-          <a:p>
-            <a:pPr algn="l"/>
-            <a:r>
-              <a:rPr sz="1000" b="0">
-                <a:solidFill>
-                  <a:srgbClr val="3D2200"/>
-                </a:solidFill>
-                <a:latin typeface="Hiragino Sans"/>
-              </a:rPr>
-              <a:t>MVP 17画面で運用開始</a:t>
-            </a:r>
-          </a:p>
-        </p:txBody>
-      </p:sp>
-      <p:sp>
-        <p:nvSpPr>
-          <p:cNvPr id="13" name="TextBox 12"/>
-          <p:cNvSpPr txBox="1"/>
-          <p:nvPr/>
-        </p:nvSpPr>
-        <p:spPr>
-          <a:xfrm>
-            <a:off x="365760" y="1865376"/>
-            <a:ext cx="3779520" cy="384048"/>
-          </a:xfrm>
-          <a:prstGeom prst="rect">
-            <a:avLst/>
-          </a:prstGeom>
-          <a:noFill/>
-        </p:spPr>
-        <p:txBody>
-          <a:bodyPr wrap="square" lIns="0" rIns="0" tIns="0" bIns="0">
-            <a:spAutoFit/>
-          </a:bodyPr>
-          <a:lstStyle/>
-          <a:p>
-            <a:pPr algn="l"/>
-            <a:r>
-              <a:rPr sz="1000" b="0">
-                <a:solidFill>
-                  <a:srgbClr val="3D2200"/>
-                </a:solidFill>
-                <a:latin typeface="Hiragino Sans"/>
-              </a:rPr>
-              <a:t>Phase 2</a:t>
-            </a:r>
-          </a:p>
-        </p:txBody>
-      </p:sp>
-      <p:sp>
-        <p:nvSpPr>
-          <p:cNvPr id="14" name="TextBox 13"/>
-          <p:cNvSpPr txBox="1"/>
-          <p:nvPr/>
-        </p:nvSpPr>
-        <p:spPr>
-          <a:xfrm>
-            <a:off x="4145280" y="1865376"/>
-            <a:ext cx="3779520" cy="384048"/>
-          </a:xfrm>
-          <a:prstGeom prst="rect">
-            <a:avLst/>
-          </a:prstGeom>
-          <a:noFill/>
-        </p:spPr>
-        <p:txBody>
-          <a:bodyPr wrap="square" lIns="0" rIns="0" tIns="0" bIns="0">
-            <a:spAutoFit/>
-          </a:bodyPr>
-          <a:lstStyle/>
-          <a:p>
-            <a:pPr algn="l"/>
-            <a:r>
-              <a:rPr sz="1000" b="0">
-                <a:solidFill>
-                  <a:srgbClr val="3D2200"/>
-                </a:solidFill>
-                <a:latin typeface="Hiragino Sans"/>
-              </a:rPr>
-              <a:t>2026/07/01〜08/31</a:t>
-            </a:r>
-          </a:p>
-        </p:txBody>
-      </p:sp>
-      <p:sp>
-        <p:nvSpPr>
-          <p:cNvPr id="15" name="TextBox 14"/>
-          <p:cNvSpPr txBox="1"/>
-          <p:nvPr/>
-        </p:nvSpPr>
-        <p:spPr>
-          <a:xfrm>
-            <a:off x="7924800" y="1865376"/>
-            <a:ext cx="3779520" cy="384048"/>
-          </a:xfrm>
-          <a:prstGeom prst="rect">
-            <a:avLst/>
-          </a:prstGeom>
-          <a:noFill/>
-        </p:spPr>
-        <p:txBody>
-          <a:bodyPr wrap="square" lIns="0" rIns="0" tIns="0" bIns="0">
-            <a:spAutoFit/>
-          </a:bodyPr>
-          <a:lstStyle/>
-          <a:p>
-            <a:pPr algn="l"/>
-            <a:r>
-              <a:rPr sz="1000" b="0">
-                <a:solidFill>
-                  <a:srgbClr val="3D2200"/>
-                </a:solidFill>
-                <a:latin typeface="Hiragino Sans"/>
-              </a:rPr>
-              <a:t>業界ニュース・記事・コラム復活 / ルームツアー撮影プラン開始</a:t>
-            </a:r>
-          </a:p>
-        </p:txBody>
-      </p:sp>
-      <p:sp>
-        <p:nvSpPr>
-          <p:cNvPr id="16" name="TextBox 15"/>
-          <p:cNvSpPr txBox="1"/>
-          <p:nvPr/>
-        </p:nvSpPr>
-        <p:spPr>
-          <a:xfrm>
-            <a:off x="365760" y="2249424"/>
-            <a:ext cx="3779520" cy="384048"/>
-          </a:xfrm>
-          <a:prstGeom prst="rect">
-            <a:avLst/>
-          </a:prstGeom>
-          <a:noFill/>
-        </p:spPr>
-        <p:txBody>
-          <a:bodyPr wrap="square" lIns="0" rIns="0" tIns="0" bIns="0">
-            <a:spAutoFit/>
-          </a:bodyPr>
-          <a:lstStyle/>
-          <a:p>
-            <a:pPr algn="l"/>
-            <a:r>
-              <a:rPr sz="1000" b="0">
-                <a:solidFill>
-                  <a:srgbClr val="3D2200"/>
-                </a:solidFill>
-                <a:latin typeface="Hiragino Sans"/>
-              </a:rPr>
-              <a:t>Phase 3</a:t>
-            </a:r>
-          </a:p>
-        </p:txBody>
-      </p:sp>
-      <p:sp>
-        <p:nvSpPr>
-          <p:cNvPr id="17" name="TextBox 16"/>
-          <p:cNvSpPr txBox="1"/>
-          <p:nvPr/>
-        </p:nvSpPr>
-        <p:spPr>
-          <a:xfrm>
-            <a:off x="4145280" y="2249424"/>
-            <a:ext cx="3779520" cy="384048"/>
-          </a:xfrm>
-          <a:prstGeom prst="rect">
-            <a:avLst/>
-          </a:prstGeom>
-          <a:noFill/>
-        </p:spPr>
-        <p:txBody>
-          <a:bodyPr wrap="square" lIns="0" rIns="0" tIns="0" bIns="0">
-            <a:spAutoFit/>
-          </a:bodyPr>
-          <a:lstStyle/>
-          <a:p>
-            <a:pPr algn="l"/>
-            <a:r>
-              <a:rPr sz="1000" b="0">
-                <a:solidFill>
-                  <a:srgbClr val="3D2200"/>
-                </a:solidFill>
-                <a:latin typeface="Hiragino Sans"/>
-              </a:rPr>
-              <a:t>2026/09/01〜11/30</a:t>
-            </a:r>
-          </a:p>
-        </p:txBody>
-      </p:sp>
-      <p:sp>
-        <p:nvSpPr>
-          <p:cNvPr id="18" name="TextBox 17"/>
-          <p:cNvSpPr txBox="1"/>
-          <p:nvPr/>
-        </p:nvSpPr>
-        <p:spPr>
-          <a:xfrm>
-            <a:off x="7924800" y="2249424"/>
-            <a:ext cx="3779520" cy="384048"/>
-          </a:xfrm>
-          <a:prstGeom prst="rect">
-            <a:avLst/>
-          </a:prstGeom>
-          <a:noFill/>
-        </p:spPr>
-        <p:txBody>
-          <a:bodyPr wrap="square" lIns="0" rIns="0" tIns="0" bIns="0">
-            <a:spAutoFit/>
-          </a:bodyPr>
-          <a:lstStyle/>
-          <a:p>
-            <a:pPr algn="l"/>
-            <a:r>
-              <a:rPr sz="1000" b="0">
-                <a:solidFill>
-                  <a:srgbClr val="3D2200"/>
-                </a:solidFill>
-                <a:latin typeface="Hiragino Sans"/>
-              </a:rPr>
-              <a:t>建売・土地・特集・シミュレーター復活 / 月額掲載プラン開始</a:t>
-            </a:r>
-          </a:p>
-        </p:txBody>
-      </p:sp>
-      <p:sp>
-        <p:nvSpPr>
-          <p:cNvPr id="19" name="TextBox 18"/>
-          <p:cNvSpPr txBox="1"/>
-          <p:nvPr/>
-        </p:nvSpPr>
-        <p:spPr>
-          <a:xfrm>
-            <a:off x="365760" y="2633472"/>
-            <a:ext cx="3779520" cy="384048"/>
-          </a:xfrm>
-          <a:prstGeom prst="rect">
-            <a:avLst/>
-          </a:prstGeom>
-          <a:noFill/>
-        </p:spPr>
-        <p:txBody>
-          <a:bodyPr wrap="square" lIns="0" rIns="0" tIns="0" bIns="0">
-            <a:spAutoFit/>
-          </a:bodyPr>
-          <a:lstStyle/>
-          <a:p>
-            <a:pPr algn="l"/>
-            <a:r>
-              <a:rPr sz="1000" b="0">
-                <a:solidFill>
-                  <a:srgbClr val="3D2200"/>
-                </a:solidFill>
-                <a:latin typeface="Hiragino Sans"/>
-              </a:rPr>
-              <a:t>Phase 4</a:t>
-            </a:r>
-          </a:p>
-        </p:txBody>
-      </p:sp>
-      <p:sp>
-        <p:nvSpPr>
-          <p:cNvPr id="20" name="TextBox 19"/>
-          <p:cNvSpPr txBox="1"/>
-          <p:nvPr/>
-        </p:nvSpPr>
-        <p:spPr>
-          <a:xfrm>
-            <a:off x="4145280" y="2633472"/>
-            <a:ext cx="3779520" cy="384048"/>
-          </a:xfrm>
-          <a:prstGeom prst="rect">
-            <a:avLst/>
-          </a:prstGeom>
-          <a:noFill/>
-        </p:spPr>
-        <p:txBody>
-          <a:bodyPr wrap="square" lIns="0" rIns="0" tIns="0" bIns="0">
-            <a:spAutoFit/>
-          </a:bodyPr>
-          <a:lstStyle/>
-          <a:p>
-            <a:pPr algn="l"/>
-            <a:r>
-              <a:rPr sz="1000" b="0">
-                <a:solidFill>
-                  <a:srgbClr val="3D2200"/>
-                </a:solidFill>
-                <a:latin typeface="Hiragino Sans"/>
-              </a:rPr>
-              <a:t>2026/12/01〜2027/02/28</a:t>
-            </a:r>
-          </a:p>
-        </p:txBody>
-      </p:sp>
-      <p:sp>
-        <p:nvSpPr>
-          <p:cNvPr id="21" name="TextBox 20"/>
-          <p:cNvSpPr txBox="1"/>
-          <p:nvPr/>
-        </p:nvSpPr>
-        <p:spPr>
-          <a:xfrm>
-            <a:off x="7924800" y="2633472"/>
-            <a:ext cx="3779520" cy="384048"/>
-          </a:xfrm>
-          <a:prstGeom prst="rect">
-            <a:avLst/>
-          </a:prstGeom>
-          <a:noFill/>
-        </p:spPr>
-        <p:txBody>
-          <a:bodyPr wrap="square" lIns="0" rIns="0" tIns="0" bIns="0">
-            <a:spAutoFit/>
-          </a:bodyPr>
-          <a:lstStyle/>
-          <a:p>
-            <a:pPr algn="l"/>
-            <a:r>
-              <a:rPr sz="1000" b="0">
-                <a:solidFill>
-                  <a:srgbClr val="3D2200"/>
-                </a:solidFill>
-                <a:latin typeface="Hiragino Sans"/>
-              </a:rPr>
-              <a:t>匿名AI質問・ウェビナー・マガジン復活 / SaaS プラン開始</a:t>
-            </a:r>
-          </a:p>
-        </p:txBody>
-      </p:sp>
-      <p:sp>
-        <p:nvSpPr>
-          <p:cNvPr id="22" name="TextBox 21"/>
-          <p:cNvSpPr txBox="1"/>
-          <p:nvPr/>
-        </p:nvSpPr>
-        <p:spPr>
-          <a:xfrm>
-            <a:off x="365760" y="3017520"/>
-            <a:ext cx="3779520" cy="384048"/>
-          </a:xfrm>
-          <a:prstGeom prst="rect">
-            <a:avLst/>
-          </a:prstGeom>
-          <a:noFill/>
-        </p:spPr>
-        <p:txBody>
-          <a:bodyPr wrap="square" lIns="0" rIns="0" tIns="0" bIns="0">
-            <a:spAutoFit/>
-          </a:bodyPr>
-          <a:lstStyle/>
-          <a:p>
-            <a:pPr algn="l"/>
-            <a:r>
-              <a:rPr sz="1000" b="0">
-                <a:solidFill>
-                  <a:srgbClr val="3D2200"/>
-                </a:solidFill>
-                <a:latin typeface="Hiragino Sans"/>
-              </a:rPr>
-              <a:t>Phase 5</a:t>
-            </a:r>
-          </a:p>
-        </p:txBody>
-      </p:sp>
-      <p:sp>
-        <p:nvSpPr>
-          <p:cNvPr id="23" name="TextBox 22"/>
-          <p:cNvSpPr txBox="1"/>
-          <p:nvPr/>
-        </p:nvSpPr>
-        <p:spPr>
-          <a:xfrm>
-            <a:off x="4145280" y="3017520"/>
-            <a:ext cx="3779520" cy="384048"/>
-          </a:xfrm>
-          <a:prstGeom prst="rect">
-            <a:avLst/>
-          </a:prstGeom>
-          <a:noFill/>
-        </p:spPr>
-        <p:txBody>
-          <a:bodyPr wrap="square" lIns="0" rIns="0" tIns="0" bIns="0">
-            <a:spAutoFit/>
-          </a:bodyPr>
-          <a:lstStyle/>
-          <a:p>
-            <a:pPr algn="l"/>
-            <a:r>
-              <a:rPr sz="1000" b="0">
-                <a:solidFill>
-                  <a:srgbClr val="3D2200"/>
-                </a:solidFill>
-                <a:latin typeface="Hiragino Sans"/>
-              </a:rPr>
-              <a:t>2027/03〜</a:t>
-            </a:r>
-          </a:p>
-        </p:txBody>
-      </p:sp>
-      <p:sp>
-        <p:nvSpPr>
-          <p:cNvPr id="24" name="TextBox 23"/>
-          <p:cNvSpPr txBox="1"/>
-          <p:nvPr/>
-        </p:nvSpPr>
-        <p:spPr>
-          <a:xfrm>
-            <a:off x="7924800" y="3017520"/>
-            <a:ext cx="3779520" cy="384048"/>
-          </a:xfrm>
-          <a:prstGeom prst="rect">
-            <a:avLst/>
-          </a:prstGeom>
-          <a:noFill/>
-        </p:spPr>
-        <p:txBody>
-          <a:bodyPr wrap="square" lIns="0" rIns="0" tIns="0" bIns="0">
-            <a:spAutoFit/>
-          </a:bodyPr>
-          <a:lstStyle/>
-          <a:p>
-            <a:pPr algn="l"/>
-            <a:r>
-              <a:rPr sz="1000" b="0">
-                <a:solidFill>
-                  <a:srgbClr val="3D2200"/>
-                </a:solidFill>
-                <a:latin typeface="Hiragino Sans"/>
-              </a:rPr>
-              <a:t>全国の工務店追加・全国マーケティング開始</a:t>
+              <a:t>• 会員登録 (成果報酬対象ユーザー化とデータ紐付け)</a:t>
             </a:r>
           </a:p>
         </p:txBody>
@@ -8081,7 +8235,7 @@
                 </a:solidFill>
                 <a:latin typeface="Hiragino Sans"/>
               </a:rPr>
-              <a:t>4. 御社へのメリット  (1/3)</a:t>
+              <a:t>5. 成果報酬 3% の付加価値 (重要)  (1/3)</a:t>
             </a:r>
           </a:p>
         </p:txBody>
@@ -8094,7 +8248,42 @@
         </p:nvSpPr>
         <p:spPr>
           <a:xfrm>
-            <a:off x="365760" y="1097280"/>
+            <a:off x="457200" y="1097280"/>
+            <a:ext cx="11338560" cy="457200"/>
+          </a:xfrm>
+          <a:prstGeom prst="rect">
+            <a:avLst/>
+          </a:prstGeom>
+          <a:noFill/>
+        </p:spPr>
+        <p:txBody>
+          <a:bodyPr wrap="square" lIns="0" rIns="0" tIns="0" bIns="0">
+            <a:spAutoFit/>
+          </a:bodyPr>
+          <a:lstStyle/>
+          <a:p>
+            <a:pPr algn="l"/>
+            <a:r>
+              <a:rPr sz="1300" b="0">
+                <a:solidFill>
+                  <a:srgbClr val="3D2200"/>
+                </a:solidFill>
+                <a:latin typeface="Hiragino Sans"/>
+              </a:rPr>
+              <a:t>ぺいほーむは「単なる送客業者」ではなく、以下の 6 つの付加価値で工務店様の成約率を高めます。</a:t>
+            </a:r>
+          </a:p>
+        </p:txBody>
+      </p:sp>
+      <p:sp>
+        <p:nvSpPr>
+          <p:cNvPr id="5" name="TextBox 4"/>
+          <p:cNvSpPr txBox="1"/>
+          <p:nvPr/>
+        </p:nvSpPr>
+        <p:spPr>
+          <a:xfrm>
+            <a:off x="365760" y="1600200"/>
             <a:ext cx="11430000" cy="457200"/>
           </a:xfrm>
           <a:prstGeom prst="rect">
@@ -8116,182 +8305,112 @@
                 </a:solidFill>
                 <a:latin typeface="Hiragino Sans"/>
               </a:rPr>
-              <a:t>Phase 1（5〜6月）</a:t>
-            </a:r>
-          </a:p>
-        </p:txBody>
-      </p:sp>
-      <p:sp>
-        <p:nvSpPr>
-          <p:cNvPr id="5" name="TextBox 4"/>
-          <p:cNvSpPr txBox="1"/>
-          <p:nvPr/>
-        </p:nvSpPr>
-        <p:spPr>
-          <a:xfrm>
-            <a:off x="640080" y="1600200"/>
-            <a:ext cx="11155680" cy="384048"/>
-          </a:xfrm>
-          <a:prstGeom prst="rect">
-            <a:avLst/>
-          </a:prstGeom>
-          <a:noFill/>
-        </p:spPr>
-        <p:txBody>
-          <a:bodyPr wrap="square" lIns="0" rIns="0" tIns="0" bIns="0">
-            <a:spAutoFit/>
-          </a:bodyPr>
-          <a:lstStyle/>
-          <a:p>
-            <a:pPr algn="l"/>
-            <a:r>
-              <a:rPr sz="1200" b="0">
+              <a:t>1. 比較整理 (Comparison)</a:t>
+            </a:r>
+          </a:p>
+        </p:txBody>
+      </p:sp>
+      <p:sp>
+        <p:nvSpPr>
+          <p:cNvPr id="6" name="TextBox 5"/>
+          <p:cNvSpPr txBox="1"/>
+          <p:nvPr/>
+        </p:nvSpPr>
+        <p:spPr>
+          <a:xfrm>
+            <a:off x="457200" y="2103120"/>
+            <a:ext cx="11338560" cy="457200"/>
+          </a:xfrm>
+          <a:prstGeom prst="rect">
+            <a:avLst/>
+          </a:prstGeom>
+          <a:noFill/>
+        </p:spPr>
+        <p:txBody>
+          <a:bodyPr wrap="square" lIns="0" rIns="0" tIns="0" bIns="0">
+            <a:spAutoFit/>
+          </a:bodyPr>
+          <a:lstStyle/>
+          <a:p>
+            <a:pPr algn="l"/>
+            <a:r>
+              <a:rPr sz="1300" b="0">
                 <a:solidFill>
                   <a:srgbClr val="3D2200"/>
                 </a:solidFill>
                 <a:latin typeface="Hiragino Sans"/>
               </a:rPr>
-              <a:t>• **見学会予約費 無料** （10社様限定）</a:t>
-            </a:r>
-          </a:p>
-        </p:txBody>
-      </p:sp>
-      <p:sp>
-        <p:nvSpPr>
-          <p:cNvPr id="6" name="TextBox 5"/>
-          <p:cNvSpPr txBox="1"/>
-          <p:nvPr/>
-        </p:nvSpPr>
-        <p:spPr>
-          <a:xfrm>
-            <a:off x="640080" y="1984248"/>
-            <a:ext cx="11155680" cy="384048"/>
-          </a:xfrm>
-          <a:prstGeom prst="rect">
-            <a:avLst/>
-          </a:prstGeom>
-          <a:noFill/>
-        </p:spPr>
-        <p:txBody>
-          <a:bodyPr wrap="square" lIns="0" rIns="0" tIns="0" bIns="0">
-            <a:spAutoFit/>
-          </a:bodyPr>
-          <a:lstStyle/>
-          <a:p>
-            <a:pPr algn="l"/>
-            <a:r>
-              <a:rPr sz="1200" b="0">
+              <a:t>動画・事例・工務店情報を横並びで整理し、ユーザーが「違いがわかる」「納得して選べる」状態で送客します。</a:t>
+            </a:r>
+          </a:p>
+        </p:txBody>
+      </p:sp>
+      <p:sp>
+        <p:nvSpPr>
+          <p:cNvPr id="7" name="TextBox 6"/>
+          <p:cNvSpPr txBox="1"/>
+          <p:nvPr/>
+        </p:nvSpPr>
+        <p:spPr>
+          <a:xfrm>
+            <a:off x="365760" y="2606039"/>
+            <a:ext cx="11430000" cy="457200"/>
+          </a:xfrm>
+          <a:prstGeom prst="rect">
+            <a:avLst/>
+          </a:prstGeom>
+          <a:noFill/>
+        </p:spPr>
+        <p:txBody>
+          <a:bodyPr wrap="square" lIns="0" rIns="0" tIns="0" bIns="0">
+            <a:spAutoFit/>
+          </a:bodyPr>
+          <a:lstStyle/>
+          <a:p>
+            <a:pPr algn="l"/>
+            <a:r>
+              <a:rPr sz="1800" b="1">
                 <a:solidFill>
                   <a:srgbClr val="3D2200"/>
                 </a:solidFill>
                 <a:latin typeface="Hiragino Sans"/>
               </a:rPr>
-              <a:t>• **成果報酬 1.5%**（市場価格の半額。1契約あたり最大でも上限 ¥250万）</a:t>
-            </a:r>
-          </a:p>
-        </p:txBody>
-      </p:sp>
-      <p:sp>
-        <p:nvSpPr>
-          <p:cNvPr id="7" name="TextBox 6"/>
-          <p:cNvSpPr txBox="1"/>
-          <p:nvPr/>
-        </p:nvSpPr>
-        <p:spPr>
-          <a:xfrm>
-            <a:off x="640080" y="2368296"/>
-            <a:ext cx="11155680" cy="384048"/>
-          </a:xfrm>
-          <a:prstGeom prst="rect">
-            <a:avLst/>
-          </a:prstGeom>
-          <a:noFill/>
-        </p:spPr>
-        <p:txBody>
-          <a:bodyPr wrap="square" lIns="0" rIns="0" tIns="0" bIns="0">
-            <a:spAutoFit/>
-          </a:bodyPr>
-          <a:lstStyle/>
-          <a:p>
-            <a:pPr algn="l"/>
-            <a:r>
-              <a:rPr sz="1200" b="0">
+              <a:t>2. 事前教育 (Pre-Education)</a:t>
+            </a:r>
+          </a:p>
+        </p:txBody>
+      </p:sp>
+      <p:sp>
+        <p:nvSpPr>
+          <p:cNvPr id="8" name="TextBox 7"/>
+          <p:cNvSpPr txBox="1"/>
+          <p:nvPr/>
+        </p:nvSpPr>
+        <p:spPr>
+          <a:xfrm>
+            <a:off x="457200" y="3108959"/>
+            <a:ext cx="11338560" cy="457200"/>
+          </a:xfrm>
+          <a:prstGeom prst="rect">
+            <a:avLst/>
+          </a:prstGeom>
+          <a:noFill/>
+        </p:spPr>
+        <p:txBody>
+          <a:bodyPr wrap="square" lIns="0" rIns="0" tIns="0" bIns="0">
+            <a:spAutoFit/>
+          </a:bodyPr>
+          <a:lstStyle/>
+          <a:p>
+            <a:pPr algn="l"/>
+            <a:r>
+              <a:rPr sz="1300" b="0">
                 <a:solidFill>
                   <a:srgbClr val="3D2200"/>
                 </a:solidFill>
                 <a:latin typeface="Hiragino Sans"/>
               </a:rPr>
-              <a:t>• AI診断でマッチしたユーザーからの送客</a:t>
-            </a:r>
-          </a:p>
-        </p:txBody>
-      </p:sp>
-      <p:sp>
-        <p:nvSpPr>
-          <p:cNvPr id="8" name="TextBox 7"/>
-          <p:cNvSpPr txBox="1"/>
-          <p:nvPr/>
-        </p:nvSpPr>
-        <p:spPr>
-          <a:xfrm>
-            <a:off x="640080" y="2752344"/>
-            <a:ext cx="11155680" cy="384048"/>
-          </a:xfrm>
-          <a:prstGeom prst="rect">
-            <a:avLst/>
-          </a:prstGeom>
-          <a:noFill/>
-        </p:spPr>
-        <p:txBody>
-          <a:bodyPr wrap="square" lIns="0" rIns="0" tIns="0" bIns="0">
-            <a:spAutoFit/>
-          </a:bodyPr>
-          <a:lstStyle/>
-          <a:p>
-            <a:pPr algn="l"/>
-            <a:r>
-              <a:rPr sz="1200" b="0">
-                <a:solidFill>
-                  <a:srgbClr val="3D2200"/>
-                </a:solidFill>
-                <a:latin typeface="Hiragino Sans"/>
-              </a:rPr>
-              <a:t>• 週次で予約・リード数のレポート送付</a:t>
-            </a:r>
-          </a:p>
-        </p:txBody>
-      </p:sp>
-      <p:sp>
-        <p:nvSpPr>
-          <p:cNvPr id="9" name="TextBox 8"/>
-          <p:cNvSpPr txBox="1"/>
-          <p:nvPr/>
-        </p:nvSpPr>
-        <p:spPr>
-          <a:xfrm>
-            <a:off x="365760" y="3136391"/>
-            <a:ext cx="11430000" cy="457200"/>
-          </a:xfrm>
-          <a:prstGeom prst="rect">
-            <a:avLst/>
-          </a:prstGeom>
-          <a:noFill/>
-        </p:spPr>
-        <p:txBody>
-          <a:bodyPr wrap="square" lIns="0" rIns="0" tIns="0" bIns="0">
-            <a:spAutoFit/>
-          </a:bodyPr>
-          <a:lstStyle/>
-          <a:p>
-            <a:pPr algn="l"/>
-            <a:r>
-              <a:rPr sz="1800" b="1">
-                <a:solidFill>
-                  <a:srgbClr val="3D2200"/>
-                </a:solidFill>
-                <a:latin typeface="Hiragino Sans"/>
-              </a:rPr>
-              <a:t>Phase 2（7〜8月）</a:t>
+              <a:t>YouTube ルームツアー42本・事例ライブラリ・AIチャットを通じて、ユーザーは家づくりの基礎知識・平屋の特性・予算感を学んだ状態で工務店に辿り着きます。工務店側の「初期説明コスト」が大幅に減ります。</a:t>
             </a:r>
           </a:p>
         </p:txBody>
